--- a/PSI_Prezentacja_Modzelewski_Wrzosek.pptx
+++ b/PSI_Prezentacja_Modzelewski_Wrzosek.pptx
@@ -16,7 +16,7 @@
     <p:sldId id="261" r:id="rId7"/>
     <p:sldId id="262" r:id="rId8"/>
   </p:sldIdLst>
-  <p:sldSz cx="9144000" cy="6858000" type="screen4x3"/>
+  <p:sldSz cx="12192000" cy="6858000"/>
   <p:notesSz cx="6858000" cy="9144000"/>
   <p:defaultTextStyle>
     <a:defPPr>
@@ -116,12 +116,12 @@
   <p:extLst>
     <p:ext uri="{EFAFB233-063F-42B5-8137-9DF3F51BA10A}">
       <p15:sldGuideLst xmlns:p15="http://schemas.microsoft.com/office/powerpoint/2012/main">
-        <p15:guide id="1" orient="horz" pos="2160">
+        <p15:guide id="1" orient="horz" pos="2160" userDrawn="1">
           <p15:clr>
             <a:srgbClr val="A4A3A4"/>
           </p15:clr>
         </p15:guide>
-        <p15:guide id="2" pos="2880">
+        <p15:guide id="2" pos="3840" userDrawn="1">
           <p15:clr>
             <a:srgbClr val="A4A3A4"/>
           </p15:clr>
@@ -285,6 +285,13 @@
           </p:nvPr>
         </p:nvSpPr>
         <p:spPr/>
+        <p:txBody>
+          <a:bodyPr/>
+          <a:lstStyle/>
+          <a:p>
+            <a:endParaRPr lang="pl-PL"/>
+          </a:p>
+        </p:txBody>
       </p:sp>
       <p:sp>
         <p:nvSpPr>
@@ -302,134 +309,22 @@
           <a:lstStyle/>
           <a:p>
             <a:r>
-              <a:rPr dirty="0" err="1"/>
-              <a:t>Wstęp</a:t>
-            </a:r>
-            <a:r>
-              <a:rPr dirty="0"/>
-              <a:t> (30 </a:t>
-            </a:r>
-            <a:r>
-              <a:rPr dirty="0" err="1"/>
-              <a:t>sekund</a:t>
-            </a:r>
-            <a:r>
-              <a:rPr dirty="0"/>
-              <a:t>): </a:t>
-            </a:r>
-            <a:r>
-              <a:rPr dirty="0" err="1"/>
-              <a:t>Dzień</a:t>
-            </a:r>
-            <a:r>
-              <a:rPr dirty="0"/>
-              <a:t> </a:t>
-            </a:r>
-            <a:r>
-              <a:rPr dirty="0" err="1"/>
-              <a:t>dobry</a:t>
-            </a:r>
-            <a:r>
-              <a:rPr dirty="0"/>
-              <a:t>, </a:t>
-            </a:r>
-            <a:r>
-              <a:rPr dirty="0" err="1"/>
-              <a:t>nazywamy</a:t>
-            </a:r>
-            <a:r>
-              <a:rPr dirty="0"/>
-              <a:t> </a:t>
-            </a:r>
-            <a:r>
-              <a:rPr dirty="0" err="1"/>
-              <a:t>się</a:t>
-            </a:r>
-            <a:r>
-              <a:rPr dirty="0"/>
-              <a:t> Maciej Modzelewski </a:t>
-            </a:r>
-            <a:r>
-              <a:rPr dirty="0" err="1"/>
-              <a:t>i</a:t>
-            </a:r>
-            <a:r>
-              <a:rPr dirty="0"/>
-              <a:t> Jakub Wrzosek. </a:t>
-            </a:r>
-            <a:r>
-              <a:rPr dirty="0" err="1"/>
-              <a:t>Chcemy</a:t>
-            </a:r>
-            <a:r>
-              <a:rPr dirty="0"/>
-              <a:t> </a:t>
-            </a:r>
-            <a:r>
-              <a:rPr dirty="0" err="1"/>
-              <a:t>zaprezentować</a:t>
-            </a:r>
-            <a:r>
-              <a:rPr dirty="0"/>
-              <a:t> </a:t>
-            </a:r>
-            <a:r>
-              <a:rPr dirty="0" err="1"/>
-              <a:t>Państwu</a:t>
-            </a:r>
-            <a:r>
-              <a:rPr dirty="0"/>
-              <a:t> </a:t>
-            </a:r>
-            <a:r>
-              <a:rPr dirty="0" err="1"/>
-              <a:t>projekt</a:t>
-            </a:r>
-            <a:r>
-              <a:rPr dirty="0"/>
-              <a:t> </a:t>
-            </a:r>
-            <a:r>
-              <a:rPr dirty="0" err="1"/>
-              <a:t>systemu</a:t>
-            </a:r>
-            <a:r>
-              <a:rPr dirty="0"/>
-              <a:t> </a:t>
-            </a:r>
-            <a:r>
-              <a:rPr dirty="0" err="1"/>
-              <a:t>informatycznego</a:t>
-            </a:r>
-            <a:r>
-              <a:rPr dirty="0"/>
-              <a:t> </a:t>
-            </a:r>
-            <a:r>
-              <a:rPr dirty="0" err="1"/>
-              <a:t>dla</a:t>
-            </a:r>
-            <a:r>
-              <a:rPr dirty="0"/>
-              <a:t> Sieci </a:t>
-            </a:r>
-            <a:r>
-              <a:rPr dirty="0" err="1"/>
-              <a:t>Hoteli</a:t>
-            </a:r>
-            <a:r>
-              <a:rPr dirty="0"/>
-              <a:t> X-Hotels</a:t>
-            </a:r>
-            <a:r>
-              <a:rPr lang="en-US" dirty="0"/>
+              <a:rPr lang="pl-PL" noProof="0" dirty="0"/>
+              <a:t>Wstęp (30 sekund): Dzień dobry, nazywamy się Maciej Modzelewski i Jakub Wrzosek. Chcemy zaprezentować Państwu projekt systemu informatycznego dla Sieci Hoteli </a:t>
+            </a:r>
+            <a:r>
+              <a:rPr lang="en-US" noProof="0" dirty="0"/>
+              <a:t>X-Hotels</a:t>
+            </a:r>
+            <a:r>
+              <a:rPr lang="pl-PL" noProof="0" dirty="0"/>
               <a:t> -</a:t>
             </a:r>
             <a:r>
-              <a:rPr lang="pl-PL" i="1" dirty="0"/>
+              <a:rPr lang="pl-PL" i="1" noProof="0" dirty="0"/>
               <a:t>nowoczesny system, który całkowicie zmieni to, jak hotele obsługują swoich gości.</a:t>
             </a:r>
-            <a:endParaRPr dirty="0"/>
+            <a:endParaRPr lang="pl-PL" noProof="0" dirty="0"/>
           </a:p>
         </p:txBody>
       </p:sp>
@@ -444,6 +339,13 @@
           </p:nvPr>
         </p:nvSpPr>
         <p:spPr/>
+        <p:txBody>
+          <a:bodyPr/>
+          <a:lstStyle/>
+          <a:p>
+            <a:endParaRPr lang="pl-PL"/>
+          </a:p>
+        </p:txBody>
       </p:sp>
     </p:spTree>
   </p:cSld>
@@ -481,6 +383,13 @@
           </p:nvPr>
         </p:nvSpPr>
         <p:spPr/>
+        <p:txBody>
+          <a:bodyPr/>
+          <a:lstStyle/>
+          <a:p>
+            <a:endParaRPr lang="pl-PL"/>
+          </a:p>
+        </p:txBody>
       </p:sp>
       <p:sp>
         <p:nvSpPr>
@@ -514,6 +423,13 @@
           </p:nvPr>
         </p:nvSpPr>
         <p:spPr/>
+        <p:txBody>
+          <a:bodyPr/>
+          <a:lstStyle/>
+          <a:p>
+            <a:endParaRPr lang="pl-PL"/>
+          </a:p>
+        </p:txBody>
       </p:sp>
     </p:spTree>
   </p:cSld>
@@ -551,6 +467,13 @@
           </p:nvPr>
         </p:nvSpPr>
         <p:spPr/>
+        <p:txBody>
+          <a:bodyPr/>
+          <a:lstStyle/>
+          <a:p>
+            <a:endParaRPr lang="pl-PL"/>
+          </a:p>
+        </p:txBody>
       </p:sp>
       <p:sp>
         <p:nvSpPr>
@@ -568,201 +491,9 @@
           <a:lstStyle/>
           <a:p>
             <a:r>
-              <a:rPr dirty="0" err="1"/>
-              <a:t>Rozwiązanie</a:t>
-            </a:r>
-            <a:r>
-              <a:rPr dirty="0"/>
-              <a:t> (1.5 </a:t>
-            </a:r>
-            <a:r>
-              <a:rPr dirty="0" err="1"/>
-              <a:t>minuty</a:t>
-            </a:r>
-            <a:r>
-              <a:rPr dirty="0"/>
-              <a:t>): Nasz system to </a:t>
-            </a:r>
-            <a:r>
-              <a:rPr dirty="0" err="1"/>
-              <a:t>nie</a:t>
-            </a:r>
-            <a:r>
-              <a:rPr dirty="0"/>
-              <a:t> </a:t>
-            </a:r>
-            <a:r>
-              <a:rPr dirty="0" err="1"/>
-              <a:t>tylko</a:t>
-            </a:r>
-            <a:r>
-              <a:rPr dirty="0"/>
-              <a:t> </a:t>
-            </a:r>
-            <a:r>
-              <a:rPr dirty="0" err="1"/>
-              <a:t>ładny</a:t>
-            </a:r>
-            <a:r>
-              <a:rPr dirty="0"/>
-              <a:t> </a:t>
-            </a:r>
-            <a:r>
-              <a:rPr dirty="0" err="1"/>
-              <a:t>interfejs</a:t>
-            </a:r>
-            <a:r>
-              <a:rPr dirty="0"/>
-              <a:t>. To </a:t>
-            </a:r>
-            <a:r>
-              <a:rPr dirty="0" err="1"/>
-              <a:t>scentralizowane</a:t>
-            </a:r>
-            <a:r>
-              <a:rPr dirty="0"/>
-              <a:t> </a:t>
-            </a:r>
-            <a:r>
-              <a:rPr dirty="0" err="1"/>
-              <a:t>serce</a:t>
-            </a:r>
-            <a:r>
-              <a:rPr dirty="0"/>
-              <a:t> </a:t>
-            </a:r>
-            <a:r>
-              <a:rPr dirty="0" err="1"/>
-              <a:t>zarządzania</a:t>
-            </a:r>
-            <a:r>
-              <a:rPr dirty="0"/>
-              <a:t> </a:t>
-            </a:r>
-            <a:r>
-              <a:rPr dirty="0" err="1"/>
-              <a:t>hotelem</a:t>
-            </a:r>
-            <a:r>
-              <a:rPr dirty="0"/>
-              <a:t>. </a:t>
-            </a:r>
-            <a:r>
-              <a:rPr dirty="0" err="1"/>
-              <a:t>Składa</a:t>
-            </a:r>
-            <a:r>
-              <a:rPr dirty="0"/>
-              <a:t> </a:t>
-            </a:r>
-            <a:r>
-              <a:rPr dirty="0" err="1"/>
-              <a:t>się</a:t>
-            </a:r>
-            <a:r>
-              <a:rPr dirty="0"/>
-              <a:t> z </a:t>
-            </a:r>
-            <a:r>
-              <a:rPr dirty="0" err="1"/>
-              <a:t>aplikacji</a:t>
-            </a:r>
-            <a:r>
-              <a:rPr dirty="0"/>
-              <a:t> </a:t>
-            </a:r>
-            <a:r>
-              <a:rPr dirty="0" err="1"/>
-              <a:t>dla</a:t>
-            </a:r>
-            <a:r>
-              <a:rPr dirty="0"/>
-              <a:t> </a:t>
-            </a:r>
-            <a:r>
-              <a:rPr dirty="0" err="1"/>
-              <a:t>gościa</a:t>
-            </a:r>
-            <a:r>
-              <a:rPr dirty="0"/>
-              <a:t>, w </a:t>
-            </a:r>
-            <a:r>
-              <a:rPr dirty="0" err="1"/>
-              <a:t>której</a:t>
-            </a:r>
-            <a:r>
-              <a:rPr dirty="0"/>
-              <a:t> </a:t>
-            </a:r>
-            <a:r>
-              <a:rPr dirty="0" err="1"/>
-              <a:t>dokonuje</a:t>
-            </a:r>
-            <a:r>
-              <a:rPr dirty="0"/>
-              <a:t> on </a:t>
-            </a:r>
-            <a:r>
-              <a:rPr dirty="0" err="1"/>
-              <a:t>pełnej</a:t>
-            </a:r>
-            <a:r>
-              <a:rPr dirty="0"/>
-              <a:t>, </a:t>
-            </a:r>
-            <a:r>
-              <a:rPr dirty="0" err="1"/>
-              <a:t>opłaconej</a:t>
-            </a:r>
-            <a:r>
-              <a:rPr dirty="0"/>
-              <a:t> </a:t>
-            </a:r>
-            <a:r>
-              <a:rPr dirty="0" err="1"/>
-              <a:t>rezerwacji</a:t>
-            </a:r>
-            <a:r>
-              <a:rPr dirty="0"/>
-              <a:t> </a:t>
-            </a:r>
-            <a:r>
-              <a:rPr dirty="0" err="1"/>
-              <a:t>oraz</a:t>
-            </a:r>
-            <a:r>
-              <a:rPr dirty="0"/>
-              <a:t> </a:t>
-            </a:r>
-            <a:r>
-              <a:rPr dirty="0" err="1"/>
-              <a:t>aplikacji</a:t>
-            </a:r>
-            <a:r>
-              <a:rPr dirty="0"/>
-              <a:t> </a:t>
-            </a:r>
-            <a:r>
-              <a:rPr dirty="0" err="1"/>
-              <a:t>dla</a:t>
-            </a:r>
-            <a:r>
-              <a:rPr dirty="0"/>
-              <a:t> </a:t>
-            </a:r>
-            <a:r>
-              <a:rPr dirty="0" err="1"/>
-              <a:t>recepcjonisty</a:t>
-            </a:r>
-            <a:r>
-              <a:t>. </a:t>
-            </a:r>
-            <a:r>
-              <a:rPr lang="pl-PL"/>
-              <a:t>Połączyliśmy płatności online bezpośrednio z logiką hotelu i fizycznym wydawaniem kluczy.</a:t>
-            </a:r>
-            <a:endParaRPr dirty="0"/>
+              <a:rPr lang="pl-PL" noProof="0" dirty="0"/>
+              <a:t>Rozwiązanie (1.5 minuty): Nasz system to nie tylko ładny interfejs. To scentralizowane serce zarządzania hotelem. Składa się z aplikacji dla gościa, w której dokonuje on pełnej, opłaconej rezerwacji oraz aplikacji dla recepcjonisty. Połączyliśmy płatności online bezpośrednio z logiką hotelu i fizycznym wydawaniem kluczy.</a:t>
+            </a:r>
           </a:p>
         </p:txBody>
       </p:sp>
@@ -777,6 +508,13 @@
           </p:nvPr>
         </p:nvSpPr>
         <p:spPr/>
+        <p:txBody>
+          <a:bodyPr/>
+          <a:lstStyle/>
+          <a:p>
+            <a:endParaRPr lang="pl-PL"/>
+          </a:p>
+        </p:txBody>
       </p:sp>
     </p:spTree>
   </p:cSld>
@@ -814,6 +552,13 @@
           </p:nvPr>
         </p:nvSpPr>
         <p:spPr/>
+        <p:txBody>
+          <a:bodyPr/>
+          <a:lstStyle/>
+          <a:p>
+            <a:endParaRPr lang="pl-PL"/>
+          </a:p>
+        </p:txBody>
       </p:sp>
       <p:sp>
         <p:nvSpPr>
@@ -831,236 +576,24 @@
           <a:lstStyle/>
           <a:p>
             <a:r>
-              <a:rPr dirty="0" err="1"/>
-              <a:t>Korzyści</a:t>
-            </a:r>
-            <a:r>
-              <a:rPr dirty="0"/>
-              <a:t> (1.5 </a:t>
-            </a:r>
-            <a:r>
-              <a:rPr dirty="0" err="1"/>
-              <a:t>minuty</a:t>
-            </a:r>
-            <a:r>
-              <a:rPr dirty="0"/>
-              <a:t>): Co to </a:t>
-            </a:r>
-            <a:r>
-              <a:rPr dirty="0" err="1"/>
-              <a:t>oznacza</a:t>
-            </a:r>
-            <a:r>
-              <a:rPr dirty="0"/>
-              <a:t> w </a:t>
-            </a:r>
-            <a:r>
-              <a:rPr dirty="0" err="1"/>
-              <a:t>praktyce</a:t>
-            </a:r>
-            <a:r>
-              <a:rPr dirty="0"/>
-              <a:t> </a:t>
-            </a:r>
-            <a:r>
-              <a:rPr dirty="0" err="1"/>
-              <a:t>biznesowej</a:t>
-            </a:r>
-            <a:r>
-              <a:rPr dirty="0"/>
-              <a:t>? </a:t>
-            </a:r>
-            <a:r>
-              <a:rPr dirty="0" err="1"/>
-              <a:t>Gwarantujemy</a:t>
-            </a:r>
-            <a:r>
-              <a:rPr dirty="0"/>
-              <a:t> SLA 99,9%</a:t>
-            </a:r>
-            <a:r>
-              <a:rPr lang="en-US" dirty="0"/>
-              <a:t> (</a:t>
-            </a:r>
-            <a:r>
-              <a:rPr lang="en-US" dirty="0" err="1"/>
-              <a:t>gwarancja</a:t>
-            </a:r>
-            <a:r>
-              <a:rPr lang="en-US" dirty="0"/>
-              <a:t> </a:t>
-            </a:r>
-            <a:r>
-              <a:rPr lang="en-US" dirty="0" err="1"/>
-              <a:t>dostepnosci</a:t>
-            </a:r>
-            <a:r>
-              <a:rPr lang="en-US" dirty="0"/>
-              <a:t> </a:t>
-            </a:r>
-            <a:r>
-              <a:rPr lang="en-US" dirty="0" err="1"/>
-              <a:t>systemu</a:t>
-            </a:r>
-            <a:r>
-              <a:rPr lang="en-US" dirty="0"/>
-              <a:t> </a:t>
-            </a:r>
-            <a:r>
-              <a:rPr lang="pl-PL" dirty="0"/>
-              <a:t>43 minuty i 50 sekund</a:t>
-            </a:r>
-            <a:r>
-              <a:rPr lang="en-US" dirty="0"/>
-              <a:t>)</a:t>
-            </a:r>
-            <a:r>
-              <a:rPr dirty="0"/>
-              <a:t>, a </a:t>
-            </a:r>
-            <a:r>
-              <a:rPr dirty="0" err="1"/>
-              <a:t>wyszukiwanie</a:t>
-            </a:r>
-            <a:r>
-              <a:rPr dirty="0"/>
-              <a:t> </a:t>
-            </a:r>
-            <a:r>
-              <a:rPr dirty="0" err="1"/>
-              <a:t>pokoi</a:t>
-            </a:r>
-            <a:r>
-              <a:rPr dirty="0"/>
-              <a:t> to </a:t>
-            </a:r>
-            <a:r>
-              <a:rPr dirty="0" err="1"/>
-              <a:t>mniej</a:t>
-            </a:r>
-            <a:r>
-              <a:rPr dirty="0"/>
-              <a:t> </a:t>
-            </a:r>
-            <a:r>
-              <a:rPr dirty="0" err="1"/>
-              <a:t>niż</a:t>
-            </a:r>
-            <a:r>
-              <a:rPr dirty="0"/>
-              <a:t> 3 </a:t>
-            </a:r>
-            <a:r>
-              <a:rPr dirty="0" err="1"/>
-              <a:t>sekundy</a:t>
-            </a:r>
-            <a:r>
-              <a:rPr dirty="0"/>
-              <a:t>. </a:t>
-            </a:r>
-            <a:r>
-              <a:rPr dirty="0" err="1"/>
-              <a:t>Eliminujemy</a:t>
-            </a:r>
-            <a:r>
-              <a:rPr dirty="0"/>
-              <a:t> overbooking do </a:t>
-            </a:r>
-            <a:r>
-              <a:rPr dirty="0" err="1"/>
-              <a:t>zera</a:t>
-            </a:r>
-            <a:r>
-              <a:rPr dirty="0"/>
-              <a:t>. To </a:t>
-            </a:r>
-            <a:r>
-              <a:rPr dirty="0" err="1"/>
-              <a:t>optymalizuje</a:t>
-            </a:r>
-            <a:r>
-              <a:rPr dirty="0"/>
-              <a:t> </a:t>
-            </a:r>
-            <a:r>
-              <a:rPr dirty="0" err="1"/>
-              <a:t>koszty</a:t>
-            </a:r>
-            <a:r>
-              <a:rPr dirty="0"/>
-              <a:t> </a:t>
-            </a:r>
-            <a:r>
-              <a:rPr dirty="0" err="1"/>
-              <a:t>i</a:t>
-            </a:r>
-            <a:r>
-              <a:rPr dirty="0"/>
-              <a:t> </a:t>
-            </a:r>
-            <a:r>
-              <a:rPr dirty="0" err="1"/>
-              <a:t>znacząco</a:t>
-            </a:r>
-            <a:r>
-              <a:rPr dirty="0"/>
-              <a:t> </a:t>
-            </a:r>
-            <a:r>
-              <a:rPr dirty="0" err="1"/>
-              <a:t>poprawia</a:t>
-            </a:r>
-            <a:r>
-              <a:rPr dirty="0"/>
-              <a:t> User Experience, </a:t>
-            </a:r>
-            <a:r>
-              <a:rPr dirty="0" err="1"/>
-              <a:t>na</a:t>
-            </a:r>
-            <a:r>
-              <a:rPr dirty="0"/>
-              <a:t> co </a:t>
-            </a:r>
-            <a:r>
-              <a:rPr dirty="0" err="1"/>
-              <a:t>kładziemy</a:t>
-            </a:r>
-            <a:r>
-              <a:rPr dirty="0"/>
-              <a:t> </a:t>
-            </a:r>
-            <a:r>
-              <a:rPr dirty="0" err="1"/>
-              <a:t>ogromny</a:t>
-            </a:r>
-            <a:r>
-              <a:rPr dirty="0"/>
-              <a:t> </a:t>
-            </a:r>
-            <a:r>
-              <a:rPr dirty="0" err="1"/>
-              <a:t>nacisk</a:t>
-            </a:r>
-            <a:r>
-              <a:rPr dirty="0"/>
-              <a:t> w </a:t>
-            </a:r>
-            <a:r>
-              <a:rPr dirty="0" err="1"/>
-              <a:t>naszym</a:t>
-            </a:r>
-            <a:r>
-              <a:rPr dirty="0"/>
-              <a:t> </a:t>
-            </a:r>
-            <a:r>
-              <a:rPr dirty="0" err="1"/>
-              <a:t>projekcie</a:t>
-            </a:r>
-            <a:r>
-              <a:rPr dirty="0"/>
-              <a:t> UI.</a:t>
+              <a:rPr lang="pl-PL" noProof="0" dirty="0"/>
+              <a:t>Korzyści (1.5 minuty): Co to oznacza w praktyce biznesowej? Gwarantujemy SLA 99,9% (gwarancja dostępności systemu 43 minuty i 50 sekund), a wyszukiwanie pokoi to mniej niż 3 sekundy. Eliminujemy </a:t>
+            </a:r>
+            <a:r>
+              <a:rPr lang="en-US" noProof="0" dirty="0"/>
+              <a:t>overbooking</a:t>
+            </a:r>
+            <a:r>
+              <a:rPr lang="pl-PL" noProof="0" dirty="0"/>
+              <a:t> do zera. To optymalizuje koszty i znacząco poprawia </a:t>
+            </a:r>
+            <a:r>
+              <a:rPr lang="en-US" noProof="0" dirty="0"/>
+              <a:t>User Experience</a:t>
+            </a:r>
+            <a:r>
+              <a:rPr lang="pl-PL" noProof="0" dirty="0"/>
+              <a:t>, na co kładziemy ogromny nacisk w naszym projekcie UI.</a:t>
             </a:r>
           </a:p>
         </p:txBody>
@@ -1076,6 +609,13 @@
           </p:nvPr>
         </p:nvSpPr>
         <p:spPr/>
+        <p:txBody>
+          <a:bodyPr/>
+          <a:lstStyle/>
+          <a:p>
+            <a:endParaRPr lang="pl-PL"/>
+          </a:p>
+        </p:txBody>
       </p:sp>
     </p:spTree>
   </p:cSld>
@@ -1113,6 +653,13 @@
           </p:nvPr>
         </p:nvSpPr>
         <p:spPr/>
+        <p:txBody>
+          <a:bodyPr/>
+          <a:lstStyle/>
+          <a:p>
+            <a:endParaRPr lang="pl-PL"/>
+          </a:p>
+        </p:txBody>
       </p:sp>
       <p:sp>
         <p:nvSpPr>
@@ -1130,268 +677,8 @@
           <a:lstStyle/>
           <a:p>
             <a:r>
-              <a:rPr dirty="0" err="1"/>
-              <a:t>Wizja</a:t>
-            </a:r>
-            <a:r>
-              <a:rPr dirty="0"/>
-              <a:t> (1 </a:t>
-            </a:r>
-            <a:r>
-              <a:rPr dirty="0" err="1"/>
-              <a:t>minuta</a:t>
-            </a:r>
-            <a:r>
-              <a:rPr dirty="0"/>
-              <a:t>): </a:t>
-            </a:r>
-            <a:r>
-              <a:rPr dirty="0" err="1"/>
-              <a:t>Wyobraźmy</a:t>
-            </a:r>
-            <a:r>
-              <a:rPr dirty="0"/>
-              <a:t> to </a:t>
-            </a:r>
-            <a:r>
-              <a:rPr dirty="0" err="1"/>
-              <a:t>sobie</a:t>
-            </a:r>
-            <a:r>
-              <a:rPr dirty="0"/>
-              <a:t>. Pan Jan </a:t>
-            </a:r>
-            <a:r>
-              <a:rPr dirty="0" err="1"/>
-              <a:t>znajduje</a:t>
-            </a:r>
-            <a:r>
-              <a:rPr dirty="0"/>
-              <a:t> z </a:t>
-            </a:r>
-            <a:r>
-              <a:rPr dirty="0" err="1"/>
-              <a:t>telefonu</a:t>
-            </a:r>
-            <a:r>
-              <a:rPr dirty="0"/>
-              <a:t> </a:t>
-            </a:r>
-            <a:r>
-              <a:rPr dirty="0" err="1"/>
-              <a:t>pokój</a:t>
-            </a:r>
-            <a:r>
-              <a:rPr dirty="0"/>
-              <a:t>, </a:t>
-            </a:r>
-            <a:r>
-              <a:rPr dirty="0" err="1"/>
-              <a:t>płaci</a:t>
-            </a:r>
-            <a:r>
-              <a:rPr dirty="0"/>
-              <a:t> </a:t>
-            </a:r>
-            <a:r>
-              <a:rPr dirty="0" err="1"/>
-              <a:t>jednym</a:t>
-            </a:r>
-            <a:r>
-              <a:rPr dirty="0"/>
-              <a:t> </a:t>
-            </a:r>
-            <a:r>
-              <a:rPr dirty="0" err="1"/>
-              <a:t>kliknięciem</a:t>
-            </a:r>
-            <a:r>
-              <a:rPr dirty="0"/>
-              <a:t>. </a:t>
-            </a:r>
-            <a:r>
-              <a:rPr dirty="0" err="1"/>
-              <a:t>Przyjeżdża</a:t>
-            </a:r>
-            <a:r>
-              <a:rPr dirty="0"/>
-              <a:t> do </a:t>
-            </a:r>
-            <a:r>
-              <a:rPr dirty="0" err="1"/>
-              <a:t>hotelu</a:t>
-            </a:r>
-            <a:r>
-              <a:rPr dirty="0"/>
-              <a:t>. </a:t>
-            </a:r>
-            <a:r>
-              <a:rPr dirty="0" err="1"/>
-              <a:t>Żadnych</a:t>
-            </a:r>
-            <a:r>
-              <a:rPr dirty="0"/>
-              <a:t> </a:t>
-            </a:r>
-            <a:r>
-              <a:rPr dirty="0" err="1"/>
-              <a:t>papierów</a:t>
-            </a:r>
-            <a:r>
-              <a:rPr dirty="0"/>
-              <a:t> do </a:t>
-            </a:r>
-            <a:r>
-              <a:rPr dirty="0" err="1"/>
-              <a:t>wypełniania</a:t>
-            </a:r>
-            <a:r>
-              <a:rPr dirty="0"/>
-              <a:t>, </a:t>
-            </a:r>
-            <a:r>
-              <a:rPr dirty="0" err="1"/>
-              <a:t>żadnego</a:t>
-            </a:r>
-            <a:r>
-              <a:rPr dirty="0"/>
-              <a:t> </a:t>
-            </a:r>
-            <a:r>
-              <a:rPr dirty="0" err="1"/>
-              <a:t>płacenia</a:t>
-            </a:r>
-            <a:r>
-              <a:rPr dirty="0"/>
-              <a:t> </a:t>
-            </a:r>
-            <a:r>
-              <a:rPr dirty="0" err="1"/>
-              <a:t>na</a:t>
-            </a:r>
-            <a:r>
-              <a:rPr dirty="0"/>
-              <a:t> </a:t>
-            </a:r>
-            <a:r>
-              <a:rPr dirty="0" err="1"/>
-              <a:t>miejscu</a:t>
-            </a:r>
-            <a:r>
-              <a:rPr dirty="0"/>
-              <a:t>. </a:t>
-            </a:r>
-            <a:r>
-              <a:rPr dirty="0" err="1"/>
-              <a:t>Podaje</a:t>
-            </a:r>
-            <a:r>
-              <a:rPr dirty="0"/>
-              <a:t> </a:t>
-            </a:r>
-            <a:r>
-              <a:rPr dirty="0" err="1"/>
-              <a:t>nazwisko</a:t>
-            </a:r>
-            <a:r>
-              <a:rPr dirty="0"/>
-              <a:t>, </a:t>
-            </a:r>
-            <a:r>
-              <a:rPr dirty="0" err="1"/>
-              <a:t>recepcjonista</a:t>
-            </a:r>
-            <a:r>
-              <a:rPr dirty="0"/>
-              <a:t> </a:t>
-            </a:r>
-            <a:r>
-              <a:rPr dirty="0" err="1"/>
-              <a:t>widzi</a:t>
-            </a:r>
-            <a:r>
-              <a:rPr dirty="0"/>
-              <a:t> </a:t>
-            </a:r>
-            <a:r>
-              <a:rPr dirty="0" err="1"/>
-              <a:t>zielone</a:t>
-            </a:r>
-            <a:r>
-              <a:rPr dirty="0"/>
-              <a:t> </a:t>
-            </a:r>
-            <a:r>
-              <a:rPr dirty="0" err="1"/>
-              <a:t>światło</a:t>
-            </a:r>
-            <a:r>
-              <a:rPr dirty="0"/>
-              <a:t> – </a:t>
-            </a:r>
-            <a:r>
-              <a:rPr dirty="0" err="1"/>
-              <a:t>saldo</a:t>
-            </a:r>
-            <a:r>
-              <a:rPr dirty="0"/>
-              <a:t> </a:t>
-            </a:r>
-            <a:r>
-              <a:rPr dirty="0" err="1"/>
-              <a:t>opłacone</a:t>
-            </a:r>
-            <a:r>
-              <a:rPr dirty="0"/>
-              <a:t>. Klika </a:t>
-            </a:r>
-            <a:r>
-              <a:rPr dirty="0" err="1"/>
-              <a:t>przycisk</a:t>
-            </a:r>
-            <a:r>
-              <a:rPr lang="en-US" dirty="0"/>
-              <a:t> I </a:t>
-            </a:r>
-            <a:r>
-              <a:rPr lang="en-US" dirty="0" err="1"/>
-              <a:t>wydaje</a:t>
-            </a:r>
-            <a:r>
-              <a:rPr lang="en-US" dirty="0"/>
-              <a:t> </a:t>
-            </a:r>
-            <a:r>
-              <a:rPr lang="en-US" dirty="0" err="1"/>
-              <a:t>klucz</a:t>
-            </a:r>
-            <a:r>
-              <a:rPr dirty="0"/>
-              <a:t>. </a:t>
-            </a:r>
-            <a:r>
-              <a:rPr dirty="0" err="1"/>
-              <a:t>Całość</a:t>
-            </a:r>
-            <a:r>
-              <a:rPr dirty="0"/>
-              <a:t> </a:t>
-            </a:r>
-            <a:r>
-              <a:rPr dirty="0" err="1"/>
-              <a:t>trwa</a:t>
-            </a:r>
-            <a:r>
-              <a:rPr dirty="0"/>
-              <a:t> 15 </a:t>
-            </a:r>
-            <a:r>
-              <a:rPr dirty="0" err="1"/>
-              <a:t>sekund</a:t>
-            </a:r>
-            <a:r>
-              <a:rPr dirty="0"/>
-              <a:t>.</a:t>
+              <a:rPr lang="pl-PL" noProof="0" dirty="0"/>
+              <a:t>Wizja (1 minuta): Wyobraźmy to sobie. Pan Jan znajduje z telefonu pokój, płaci jednym kliknięciem. Przyjeżdża do hotelu. Żadnych papierów do wypełniania, żadnego płacenia na miejscu. Podaje nazwisko, recepcjonista widzi zielone światło – saldo opłacone. Klika przycisk I wydaje klucz. Całość trwa 15 sekund.</a:t>
             </a:r>
           </a:p>
         </p:txBody>
@@ -1407,6 +694,13 @@
           </p:nvPr>
         </p:nvSpPr>
         <p:spPr/>
+        <p:txBody>
+          <a:bodyPr/>
+          <a:lstStyle/>
+          <a:p>
+            <a:endParaRPr lang="pl-PL"/>
+          </a:p>
+        </p:txBody>
       </p:sp>
     </p:spTree>
   </p:cSld>
@@ -1444,6 +738,13 @@
           </p:nvPr>
         </p:nvSpPr>
         <p:spPr/>
+        <p:txBody>
+          <a:bodyPr/>
+          <a:lstStyle/>
+          <a:p>
+            <a:endParaRPr lang="pl-PL"/>
+          </a:p>
+        </p:txBody>
       </p:sp>
       <p:sp>
         <p:nvSpPr>
@@ -1461,208 +762,8 @@
           <a:lstStyle/>
           <a:p>
             <a:r>
-              <a:rPr dirty="0"/>
-              <a:t>CTA (1 </a:t>
-            </a:r>
-            <a:r>
-              <a:rPr dirty="0" err="1"/>
-              <a:t>minuta</a:t>
-            </a:r>
-            <a:r>
-              <a:rPr dirty="0"/>
-              <a:t>): </a:t>
-            </a:r>
-            <a:r>
-              <a:rPr dirty="0" err="1"/>
-              <a:t>Nasze</a:t>
-            </a:r>
-            <a:r>
-              <a:rPr dirty="0"/>
-              <a:t> </a:t>
-            </a:r>
-            <a:r>
-              <a:rPr dirty="0" err="1"/>
-              <a:t>rozwiązanie</a:t>
-            </a:r>
-            <a:r>
-              <a:rPr dirty="0"/>
-              <a:t> </a:t>
-            </a:r>
-            <a:r>
-              <a:rPr dirty="0" err="1"/>
-              <a:t>nie</a:t>
-            </a:r>
-            <a:r>
-              <a:rPr dirty="0"/>
-              <a:t> jest </a:t>
-            </a:r>
-            <a:r>
-              <a:rPr dirty="0" err="1"/>
-              <a:t>tylko</a:t>
-            </a:r>
-            <a:r>
-              <a:rPr dirty="0"/>
-              <a:t> </a:t>
-            </a:r>
-            <a:r>
-              <a:rPr dirty="0" err="1"/>
-              <a:t>abstrakcyjnym</a:t>
-            </a:r>
-            <a:r>
-              <a:rPr dirty="0"/>
-              <a:t> </a:t>
-            </a:r>
-            <a:r>
-              <a:rPr dirty="0" err="1"/>
-              <a:t>pomysłem</a:t>
-            </a:r>
-            <a:r>
-              <a:rPr dirty="0"/>
-              <a:t>. </a:t>
-            </a:r>
-            <a:r>
-              <a:rPr dirty="0" err="1"/>
-              <a:t>Przekłada</a:t>
-            </a:r>
-            <a:r>
-              <a:rPr dirty="0"/>
-              <a:t> </a:t>
-            </a:r>
-            <a:r>
-              <a:rPr dirty="0" err="1"/>
-              <a:t>się</a:t>
-            </a:r>
-            <a:r>
-              <a:rPr dirty="0"/>
-              <a:t> </a:t>
-            </a:r>
-            <a:r>
-              <a:rPr dirty="0" err="1"/>
-              <a:t>na</a:t>
-            </a:r>
-            <a:r>
-              <a:rPr dirty="0"/>
-              <a:t> </a:t>
-            </a:r>
-            <a:r>
-              <a:rPr dirty="0" err="1"/>
-              <a:t>konkretne</a:t>
-            </a:r>
-            <a:r>
-              <a:rPr dirty="0"/>
-              <a:t> </a:t>
-            </a:r>
-            <a:r>
-              <a:rPr dirty="0" err="1"/>
-              <a:t>diagramy</a:t>
-            </a:r>
-            <a:r>
-              <a:rPr dirty="0"/>
-              <a:t> w </a:t>
-            </a:r>
-            <a:r>
-              <a:rPr dirty="0" err="1"/>
-              <a:t>notacji</a:t>
-            </a:r>
-            <a:r>
-              <a:rPr dirty="0"/>
-              <a:t> UML, </a:t>
-            </a:r>
-            <a:r>
-              <a:rPr dirty="0" err="1"/>
-              <a:t>relacyjną</a:t>
-            </a:r>
-            <a:r>
-              <a:rPr dirty="0"/>
-              <a:t> </a:t>
-            </a:r>
-            <a:r>
-              <a:rPr dirty="0" err="1"/>
-              <a:t>bazę</a:t>
-            </a:r>
-            <a:r>
-              <a:rPr dirty="0"/>
-              <a:t> </a:t>
-            </a:r>
-            <a:r>
-              <a:rPr dirty="0" err="1"/>
-              <a:t>danych</a:t>
-            </a:r>
-            <a:r>
-              <a:rPr dirty="0"/>
-              <a:t> </a:t>
-            </a:r>
-            <a:r>
-              <a:rPr dirty="0" err="1"/>
-              <a:t>i</a:t>
-            </a:r>
-            <a:r>
-              <a:rPr dirty="0"/>
-              <a:t> </a:t>
-            </a:r>
-            <a:r>
-              <a:rPr dirty="0" err="1"/>
-              <a:t>zaprojektowane</a:t>
-            </a:r>
-            <a:r>
-              <a:rPr dirty="0"/>
-              <a:t> </a:t>
-            </a:r>
-            <a:r>
-              <a:rPr dirty="0" err="1"/>
-              <a:t>makiety</a:t>
-            </a:r>
-            <a:r>
-              <a:rPr dirty="0"/>
-              <a:t>, </a:t>
-            </a:r>
-            <a:r>
-              <a:rPr dirty="0" err="1"/>
-              <a:t>które</a:t>
-            </a:r>
-            <a:r>
-              <a:rPr dirty="0"/>
-              <a:t> </a:t>
-            </a:r>
-            <a:r>
-              <a:rPr dirty="0" err="1"/>
-              <a:t>przygotowaliśmy</a:t>
-            </a:r>
-            <a:r>
-              <a:rPr dirty="0"/>
-              <a:t> w </a:t>
-            </a:r>
-            <a:r>
-              <a:rPr dirty="0" err="1"/>
-              <a:t>dokumentacji</a:t>
-            </a:r>
-            <a:r>
-              <a:rPr dirty="0"/>
-              <a:t> </a:t>
-            </a:r>
-            <a:r>
-              <a:rPr dirty="0" err="1"/>
-              <a:t>projektu</a:t>
-            </a:r>
-            <a:r>
-              <a:rPr dirty="0"/>
-              <a:t>. </a:t>
-            </a:r>
-            <a:r>
-              <a:rPr dirty="0" err="1"/>
-              <a:t>Zbudowaliśmy</a:t>
-            </a:r>
-            <a:r>
-              <a:rPr dirty="0"/>
-              <a:t> </a:t>
-            </a:r>
-            <a:r>
-              <a:rPr dirty="0" err="1"/>
-              <a:t>solidny</a:t>
-            </a:r>
-            <a:r>
-              <a:rPr dirty="0"/>
-              <a:t> fundament. </a:t>
+              <a:rPr lang="pl-PL" noProof="0" dirty="0"/>
+              <a:t>CTA (1 minuta): Nasze rozwiązanie nie jest tylko abstrakcyjnym pomysłem. Przekłada się na konkretne diagramy w notacji UML, relacyjną bazę danych i zaprojektowane makiety, które przygotowaliśmy w dokumentacji projektu. Zbudowaliśmy solidny fundament. </a:t>
             </a:r>
           </a:p>
         </p:txBody>
@@ -1678,6 +779,13 @@
           </p:nvPr>
         </p:nvSpPr>
         <p:spPr/>
+        <p:txBody>
+          <a:bodyPr/>
+          <a:lstStyle/>
+          <a:p>
+            <a:endParaRPr lang="pl-PL"/>
+          </a:p>
+        </p:txBody>
       </p:sp>
     </p:spTree>
   </p:cSld>
@@ -1716,8 +824,8 @@
         </p:nvSpPr>
         <p:spPr>
           <a:xfrm>
-            <a:off x="1371600" y="1143000"/>
-            <a:ext cx="4114800" cy="3086100"/>
+            <a:off x="685800" y="1143000"/>
+            <a:ext cx="5486400" cy="3086100"/>
           </a:xfrm>
           <a:prstGeom prst="rect">
             <a:avLst/>
@@ -1729,6 +837,13 @@
             </a:solidFill>
           </a:ln>
         </p:spPr>
+        <p:txBody>
+          <a:bodyPr/>
+          <a:lstStyle/>
+          <a:p>
+            <a:endParaRPr lang="pl-PL"/>
+          </a:p>
+        </p:txBody>
       </p:sp>
       <p:sp>
         <p:nvSpPr>
@@ -1802,8 +917,8 @@
         </p:nvSpPr>
         <p:spPr>
           <a:xfrm>
-            <a:off x="685800" y="2130425"/>
-            <a:ext cx="7772400" cy="1470025"/>
+            <a:off x="914400" y="2130426"/>
+            <a:ext cx="10363200" cy="1470025"/>
           </a:xfrm>
         </p:spPr>
         <p:txBody>
@@ -1829,8 +944,8 @@
         </p:nvSpPr>
         <p:spPr>
           <a:xfrm>
-            <a:off x="1371600" y="3886200"/>
-            <a:ext cx="6400800" cy="1752600"/>
+            <a:off x="1828800" y="3886200"/>
+            <a:ext cx="8534400" cy="1752600"/>
           </a:xfrm>
         </p:spPr>
         <p:txBody>
@@ -1952,7 +1067,7 @@
           <a:p>
             <a:fld id="{5BCAD085-E8A6-8845-BD4E-CB4CCA059FC4}" type="datetimeFigureOut">
               <a:rPr lang="en-US" smtClean="0"/>
-              <a:t>5/18/2026</a:t>
+              <a:t>5/21/26</a:t>
             </a:fld>
             <a:endParaRPr lang="en-US"/>
           </a:p>
@@ -2120,7 +1235,7 @@
           <a:p>
             <a:fld id="{5BCAD085-E8A6-8845-BD4E-CB4CCA059FC4}" type="datetimeFigureOut">
               <a:rPr lang="en-US" smtClean="0"/>
-              <a:t>5/18/2026</a:t>
+              <a:t>5/21/26</a:t>
             </a:fld>
             <a:endParaRPr lang="en-US"/>
           </a:p>
@@ -2210,8 +1325,8 @@
         </p:nvSpPr>
         <p:spPr>
           <a:xfrm>
-            <a:off x="6629400" y="274638"/>
-            <a:ext cx="2057400" cy="5851525"/>
+            <a:off x="8839200" y="274639"/>
+            <a:ext cx="2743200" cy="5851525"/>
           </a:xfrm>
         </p:spPr>
         <p:txBody>
@@ -2237,8 +1352,8 @@
         </p:nvSpPr>
         <p:spPr>
           <a:xfrm>
-            <a:off x="457200" y="274638"/>
-            <a:ext cx="6019800" cy="5851525"/>
+            <a:off x="609600" y="274639"/>
+            <a:ext cx="8026400" cy="5851525"/>
           </a:xfrm>
         </p:spPr>
         <p:txBody>
@@ -2298,7 +1413,7 @@
           <a:p>
             <a:fld id="{5BCAD085-E8A6-8845-BD4E-CB4CCA059FC4}" type="datetimeFigureOut">
               <a:rPr lang="en-US" smtClean="0"/>
-              <a:t>5/18/2026</a:t>
+              <a:t>5/21/26</a:t>
             </a:fld>
             <a:endParaRPr lang="en-US"/>
           </a:p>
@@ -2466,7 +1581,7 @@
           <a:p>
             <a:fld id="{5BCAD085-E8A6-8845-BD4E-CB4CCA059FC4}" type="datetimeFigureOut">
               <a:rPr lang="en-US" smtClean="0"/>
-              <a:t>5/18/2026</a:t>
+              <a:t>5/21/26</a:t>
             </a:fld>
             <a:endParaRPr lang="en-US"/>
           </a:p>
@@ -2556,8 +1671,8 @@
         </p:nvSpPr>
         <p:spPr>
           <a:xfrm>
-            <a:off x="722313" y="4406900"/>
-            <a:ext cx="7772400" cy="1362075"/>
+            <a:off x="963084" y="4406901"/>
+            <a:ext cx="10363200" cy="1362075"/>
           </a:xfrm>
         </p:spPr>
         <p:txBody>
@@ -2587,8 +1702,8 @@
         </p:nvSpPr>
         <p:spPr>
           <a:xfrm>
-            <a:off x="722313" y="2906713"/>
-            <a:ext cx="7772400" cy="1500187"/>
+            <a:off x="963084" y="2906713"/>
+            <a:ext cx="10363200" cy="1500187"/>
           </a:xfrm>
         </p:spPr>
         <p:txBody>
@@ -2711,7 +1826,7 @@
           <a:p>
             <a:fld id="{5BCAD085-E8A6-8845-BD4E-CB4CCA059FC4}" type="datetimeFigureOut">
               <a:rPr lang="en-US" smtClean="0"/>
-              <a:t>5/18/2026</a:t>
+              <a:t>5/21/26</a:t>
             </a:fld>
             <a:endParaRPr lang="en-US"/>
           </a:p>
@@ -2823,8 +1938,8 @@
         </p:nvSpPr>
         <p:spPr>
           <a:xfrm>
-            <a:off x="457200" y="1600200"/>
-            <a:ext cx="4038600" cy="4525963"/>
+            <a:off x="609600" y="1600201"/>
+            <a:ext cx="5384800" cy="4525963"/>
           </a:xfrm>
         </p:spPr>
         <p:txBody>
@@ -2907,8 +2022,8 @@
         </p:nvSpPr>
         <p:spPr>
           <a:xfrm>
-            <a:off x="4648200" y="1600200"/>
-            <a:ext cx="4038600" cy="4525963"/>
+            <a:off x="6197600" y="1600201"/>
+            <a:ext cx="5384800" cy="4525963"/>
           </a:xfrm>
         </p:spPr>
         <p:txBody>
@@ -2996,7 +2111,7 @@
           <a:p>
             <a:fld id="{5BCAD085-E8A6-8845-BD4E-CB4CCA059FC4}" type="datetimeFigureOut">
               <a:rPr lang="en-US" smtClean="0"/>
-              <a:t>5/18/2026</a:t>
+              <a:t>5/21/26</a:t>
             </a:fld>
             <a:endParaRPr lang="en-US"/>
           </a:p>
@@ -3112,8 +2227,8 @@
         </p:nvSpPr>
         <p:spPr>
           <a:xfrm>
-            <a:off x="457200" y="1535113"/>
-            <a:ext cx="4040188" cy="639762"/>
+            <a:off x="609600" y="1535113"/>
+            <a:ext cx="5386917" cy="639762"/>
           </a:xfrm>
         </p:spPr>
         <p:txBody>
@@ -3177,8 +2292,8 @@
         </p:nvSpPr>
         <p:spPr>
           <a:xfrm>
-            <a:off x="457200" y="2174875"/>
-            <a:ext cx="4040188" cy="3951288"/>
+            <a:off x="609600" y="2174875"/>
+            <a:ext cx="5386917" cy="3951288"/>
           </a:xfrm>
         </p:spPr>
         <p:txBody>
@@ -3261,8 +2376,8 @@
         </p:nvSpPr>
         <p:spPr>
           <a:xfrm>
-            <a:off x="4645025" y="1535113"/>
-            <a:ext cx="4041775" cy="639762"/>
+            <a:off x="6193368" y="1535113"/>
+            <a:ext cx="5389033" cy="639762"/>
           </a:xfrm>
         </p:spPr>
         <p:txBody>
@@ -3326,8 +2441,8 @@
         </p:nvSpPr>
         <p:spPr>
           <a:xfrm>
-            <a:off x="4645025" y="2174875"/>
-            <a:ext cx="4041775" cy="3951288"/>
+            <a:off x="6193368" y="2174875"/>
+            <a:ext cx="5389033" cy="3951288"/>
           </a:xfrm>
         </p:spPr>
         <p:txBody>
@@ -3415,7 +2530,7 @@
           <a:p>
             <a:fld id="{5BCAD085-E8A6-8845-BD4E-CB4CCA059FC4}" type="datetimeFigureOut">
               <a:rPr lang="en-US" smtClean="0"/>
-              <a:t>5/18/2026</a:t>
+              <a:t>5/21/26</a:t>
             </a:fld>
             <a:endParaRPr lang="en-US"/>
           </a:p>
@@ -3532,7 +2647,7 @@
           <a:p>
             <a:fld id="{5BCAD085-E8A6-8845-BD4E-CB4CCA059FC4}" type="datetimeFigureOut">
               <a:rPr lang="en-US" smtClean="0"/>
-              <a:t>5/18/2026</a:t>
+              <a:t>5/21/26</a:t>
             </a:fld>
             <a:endParaRPr lang="en-US"/>
           </a:p>
@@ -3627,7 +2742,7 @@
           <a:p>
             <a:fld id="{5BCAD085-E8A6-8845-BD4E-CB4CCA059FC4}" type="datetimeFigureOut">
               <a:rPr lang="en-US" smtClean="0"/>
-              <a:t>5/18/2026</a:t>
+              <a:t>5/21/26</a:t>
             </a:fld>
             <a:endParaRPr lang="en-US"/>
           </a:p>
@@ -3717,8 +2832,8 @@
         </p:nvSpPr>
         <p:spPr>
           <a:xfrm>
-            <a:off x="457200" y="273050"/>
-            <a:ext cx="3008313" cy="1162050"/>
+            <a:off x="609601" y="273050"/>
+            <a:ext cx="4011084" cy="1162050"/>
           </a:xfrm>
         </p:spPr>
         <p:txBody>
@@ -3748,8 +2863,8 @@
         </p:nvSpPr>
         <p:spPr>
           <a:xfrm>
-            <a:off x="3575050" y="273050"/>
-            <a:ext cx="5111750" cy="5853113"/>
+            <a:off x="4766733" y="273051"/>
+            <a:ext cx="6815667" cy="5853113"/>
           </a:xfrm>
         </p:spPr>
         <p:txBody>
@@ -3832,8 +2947,8 @@
         </p:nvSpPr>
         <p:spPr>
           <a:xfrm>
-            <a:off x="457200" y="1435100"/>
-            <a:ext cx="3008313" cy="4691063"/>
+            <a:off x="609601" y="1435101"/>
+            <a:ext cx="4011084" cy="4691063"/>
           </a:xfrm>
         </p:spPr>
         <p:txBody>
@@ -3902,7 +3017,7 @@
           <a:p>
             <a:fld id="{5BCAD085-E8A6-8845-BD4E-CB4CCA059FC4}" type="datetimeFigureOut">
               <a:rPr lang="en-US" smtClean="0"/>
-              <a:t>5/18/2026</a:t>
+              <a:t>5/21/26</a:t>
             </a:fld>
             <a:endParaRPr lang="en-US"/>
           </a:p>
@@ -3992,8 +3107,8 @@
         </p:nvSpPr>
         <p:spPr>
           <a:xfrm>
-            <a:off x="1792288" y="4800600"/>
-            <a:ext cx="5486400" cy="566738"/>
+            <a:off x="2389717" y="4800600"/>
+            <a:ext cx="7315200" cy="566738"/>
           </a:xfrm>
         </p:spPr>
         <p:txBody>
@@ -4023,8 +3138,8 @@
         </p:nvSpPr>
         <p:spPr>
           <a:xfrm>
-            <a:off x="1792288" y="612775"/>
-            <a:ext cx="5486400" cy="4114800"/>
+            <a:off x="2389717" y="612775"/>
+            <a:ext cx="7315200" cy="4114800"/>
           </a:xfrm>
         </p:spPr>
         <p:txBody>
@@ -4084,8 +3199,8 @@
         </p:nvSpPr>
         <p:spPr>
           <a:xfrm>
-            <a:off x="1792288" y="5367338"/>
-            <a:ext cx="5486400" cy="804862"/>
+            <a:off x="2389717" y="5367338"/>
+            <a:ext cx="7315200" cy="804862"/>
           </a:xfrm>
         </p:spPr>
         <p:txBody>
@@ -4154,7 +3269,7 @@
           <a:p>
             <a:fld id="{5BCAD085-E8A6-8845-BD4E-CB4CCA059FC4}" type="datetimeFigureOut">
               <a:rPr lang="en-US" smtClean="0"/>
-              <a:t>5/18/2026</a:t>
+              <a:t>5/21/26</a:t>
             </a:fld>
             <a:endParaRPr lang="en-US"/>
           </a:p>
@@ -4249,8 +3364,8 @@
         </p:nvSpPr>
         <p:spPr>
           <a:xfrm>
-            <a:off x="457200" y="274638"/>
-            <a:ext cx="8229600" cy="1143000"/>
+            <a:off x="609600" y="274638"/>
+            <a:ext cx="10972800" cy="1143000"/>
           </a:xfrm>
           <a:prstGeom prst="rect">
             <a:avLst/>
@@ -4281,8 +3396,8 @@
         </p:nvSpPr>
         <p:spPr>
           <a:xfrm>
-            <a:off x="457200" y="1600200"/>
-            <a:ext cx="8229600" cy="4525963"/>
+            <a:off x="609600" y="1600201"/>
+            <a:ext cx="10972800" cy="4525963"/>
           </a:xfrm>
           <a:prstGeom prst="rect">
             <a:avLst/>
@@ -4342,8 +3457,8 @@
         </p:nvSpPr>
         <p:spPr>
           <a:xfrm>
-            <a:off x="457200" y="6356350"/>
-            <a:ext cx="2133600" cy="365125"/>
+            <a:off x="609600" y="6356351"/>
+            <a:ext cx="2844800" cy="365125"/>
           </a:xfrm>
           <a:prstGeom prst="rect">
             <a:avLst/>
@@ -4365,7 +3480,7 @@
           <a:p>
             <a:fld id="{5BCAD085-E8A6-8845-BD4E-CB4CCA059FC4}" type="datetimeFigureOut">
               <a:rPr lang="en-US" smtClean="0"/>
-              <a:t>5/18/2026</a:t>
+              <a:t>5/21/26</a:t>
             </a:fld>
             <a:endParaRPr lang="en-US"/>
           </a:p>
@@ -4383,8 +3498,8 @@
         </p:nvSpPr>
         <p:spPr>
           <a:xfrm>
-            <a:off x="3124200" y="6356350"/>
-            <a:ext cx="2895600" cy="365125"/>
+            <a:off x="4165600" y="6356351"/>
+            <a:ext cx="3860800" cy="365125"/>
           </a:xfrm>
           <a:prstGeom prst="rect">
             <a:avLst/>
@@ -4420,8 +3535,8 @@
         </p:nvSpPr>
         <p:spPr>
           <a:xfrm>
-            <a:off x="6553200" y="6356350"/>
-            <a:ext cx="2133600" cy="365125"/>
+            <a:off x="8737600" y="6356351"/>
+            <a:ext cx="2844800" cy="365125"/>
           </a:xfrm>
           <a:prstGeom prst="rect">
             <a:avLst/>
@@ -4726,6 +3841,14 @@
 <file path=ppt/slides/slide1.xml><?xml version="1.0" encoding="utf-8"?>
 <p:sld xmlns:a="http://schemas.openxmlformats.org/drawingml/2006/main" xmlns:r="http://schemas.openxmlformats.org/officeDocument/2006/relationships" xmlns:p="http://schemas.openxmlformats.org/presentationml/2006/main">
   <p:cSld>
+    <p:bg>
+      <p:bgPr>
+        <a:solidFill>
+          <a:schemeClr val="bg1"/>
+        </a:solidFill>
+        <a:effectLst/>
+      </p:bgPr>
+    </p:bg>
     <p:spTree>
       <p:nvGrpSpPr>
         <p:cNvPr id="1" name=""/>
@@ -4740,6 +3863,183 @@
           <a:chExt cx="0" cy="0"/>
         </a:xfrm>
       </p:grpSpPr>
+      <p:sp useBgFill="1">
+        <p:nvSpPr>
+          <p:cNvPr id="18" name="Rectangle 17">
+            <a:extLst>
+              <a:ext uri="{FF2B5EF4-FFF2-40B4-BE49-F238E27FC236}">
+                <a16:creationId xmlns:a16="http://schemas.microsoft.com/office/drawing/2014/main" id="{ECC07320-C2CA-4E29-8481-9D9E143C7788}"/>
+              </a:ext>
+              <a:ext uri="{C183D7F6-B498-43B3-948B-1728B52AA6E4}">
+                <adec:decorative xmlns:adec="http://schemas.microsoft.com/office/drawing/2017/decorative" val="1"/>
+              </a:ext>
+            </a:extLst>
+          </p:cNvPr>
+          <p:cNvSpPr>
+            <a:spLocks noChangeAspect="1"/>
+          </p:cNvSpPr>
+          <p:nvPr>
+            <p:extLst>
+              <p:ext uri="{386F3935-93C4-4BCD-93E2-E3B085C9AB24}">
+                <p16:designElem xmlns:p16="http://schemas.microsoft.com/office/powerpoint/2015/main" val="1"/>
+              </p:ext>
+            </p:extLst>
+          </p:nvPr>
+        </p:nvSpPr>
+        <p:spPr>
+          <a:xfrm>
+            <a:off x="-1" y="0"/>
+            <a:ext cx="12188952" cy="6858000"/>
+          </a:xfrm>
+          <a:prstGeom prst="rect">
+            <a:avLst/>
+          </a:prstGeom>
+          <a:ln>
+            <a:noFill/>
+          </a:ln>
+        </p:spPr>
+        <p:style>
+          <a:lnRef idx="2">
+            <a:schemeClr val="accent1">
+              <a:shade val="50000"/>
+            </a:schemeClr>
+          </a:lnRef>
+          <a:fillRef idx="1">
+            <a:schemeClr val="accent1"/>
+          </a:fillRef>
+          <a:effectRef idx="0">
+            <a:schemeClr val="accent1"/>
+          </a:effectRef>
+          <a:fontRef idx="minor">
+            <a:schemeClr val="lt1"/>
+          </a:fontRef>
+        </p:style>
+        <p:txBody>
+          <a:bodyPr rtlCol="0" anchor="ctr"/>
+          <a:lstStyle/>
+          <a:p>
+            <a:pPr algn="ctr"/>
+            <a:endParaRPr lang="en-US"/>
+          </a:p>
+        </p:txBody>
+      </p:sp>
+      <p:pic>
+        <p:nvPicPr>
+          <p:cNvPr id="4" name="Obraz 3">
+            <a:extLst>
+              <a:ext uri="{FF2B5EF4-FFF2-40B4-BE49-F238E27FC236}">
+                <a16:creationId xmlns:a16="http://schemas.microsoft.com/office/drawing/2014/main" id="{AF86DBD5-3C18-04CB-5550-72BA9BBDCBA7}"/>
+              </a:ext>
+            </a:extLst>
+          </p:cNvPr>
+          <p:cNvPicPr>
+            <a:picLocks noChangeAspect="1"/>
+          </p:cNvPicPr>
+          <p:nvPr/>
+        </p:nvPicPr>
+        <p:blipFill>
+          <a:blip r:embed="rId3"/>
+          <a:srcRect l="14739" r="5950"/>
+          <a:stretch>
+            <a:fillRect/>
+          </a:stretch>
+        </p:blipFill>
+        <p:spPr>
+          <a:xfrm>
+            <a:off x="1" y="10"/>
+            <a:ext cx="9669642" cy="6857990"/>
+          </a:xfrm>
+          <a:prstGeom prst="rect">
+            <a:avLst/>
+          </a:prstGeom>
+        </p:spPr>
+      </p:pic>
+      <p:sp>
+        <p:nvSpPr>
+          <p:cNvPr id="20" name="Rectangle 19">
+            <a:extLst>
+              <a:ext uri="{FF2B5EF4-FFF2-40B4-BE49-F238E27FC236}">
+                <a16:creationId xmlns:a16="http://schemas.microsoft.com/office/drawing/2014/main" id="{178FB36B-5BFE-42CA-BC60-1115E0D95EEC}"/>
+              </a:ext>
+              <a:ext uri="{C183D7F6-B498-43B3-948B-1728B52AA6E4}">
+                <adec:decorative xmlns:adec="http://schemas.microsoft.com/office/drawing/2017/decorative" val="1"/>
+              </a:ext>
+            </a:extLst>
+          </p:cNvPr>
+          <p:cNvSpPr>
+            <a:spLocks noGrp="1" noRot="1" noChangeAspect="1" noMove="1" noResize="1" noEditPoints="1" noAdjustHandles="1" noChangeArrowheads="1" noChangeShapeType="1" noTextEdit="1"/>
+          </p:cNvSpPr>
+          <p:nvPr>
+            <p:extLst>
+              <p:ext uri="{386F3935-93C4-4BCD-93E2-E3B085C9AB24}">
+                <p16:designElem xmlns:p16="http://schemas.microsoft.com/office/powerpoint/2015/main" val="1"/>
+              </p:ext>
+            </p:extLst>
+          </p:nvPr>
+        </p:nvSpPr>
+        <p:spPr>
+          <a:xfrm flipH="1">
+            <a:off x="5125019" y="0"/>
+            <a:ext cx="7066978" cy="6858000"/>
+          </a:xfrm>
+          <a:prstGeom prst="rect">
+            <a:avLst/>
+          </a:prstGeom>
+          <a:gradFill>
+            <a:gsLst>
+              <a:gs pos="48000">
+                <a:schemeClr val="bg1"/>
+              </a:gs>
+              <a:gs pos="35000">
+                <a:schemeClr val="bg1">
+                  <a:alpha val="77000"/>
+                </a:schemeClr>
+              </a:gs>
+              <a:gs pos="19000">
+                <a:schemeClr val="bg1">
+                  <a:alpha val="38000"/>
+                </a:schemeClr>
+              </a:gs>
+              <a:gs pos="0">
+                <a:schemeClr val="bg1">
+                  <a:alpha val="0"/>
+                </a:schemeClr>
+              </a:gs>
+              <a:gs pos="100000">
+                <a:schemeClr val="bg1"/>
+              </a:gs>
+            </a:gsLst>
+            <a:lin ang="10800000" scaled="0"/>
+          </a:gradFill>
+          <a:ln>
+            <a:noFill/>
+          </a:ln>
+        </p:spPr>
+        <p:style>
+          <a:lnRef idx="2">
+            <a:schemeClr val="accent1">
+              <a:shade val="50000"/>
+            </a:schemeClr>
+          </a:lnRef>
+          <a:fillRef idx="1">
+            <a:schemeClr val="accent1"/>
+          </a:fillRef>
+          <a:effectRef idx="0">
+            <a:schemeClr val="accent1"/>
+          </a:effectRef>
+          <a:fontRef idx="minor">
+            <a:schemeClr val="lt1"/>
+          </a:fontRef>
+        </p:style>
+        <p:txBody>
+          <a:bodyPr rtlCol="0" anchor="ctr"/>
+          <a:lstStyle/>
+          <a:p>
+            <a:pPr algn="ctr"/>
+            <a:endParaRPr lang="en-US" dirty="0"/>
+          </a:p>
+        </p:txBody>
+      </p:sp>
       <p:sp>
         <p:nvSpPr>
           <p:cNvPr id="2" name="Title 1"/>
@@ -4750,14 +4050,29 @@
             <p:ph type="ctrTitle"/>
           </p:nvPr>
         </p:nvSpPr>
-        <p:spPr/>
-        <p:txBody>
-          <a:bodyPr/>
-          <a:lstStyle/>
-          <a:p>
-            <a:r>
-              <a:t>System Informatyczny dla Sieci Hoteli X-Hotels</a:t>
-            </a:r>
+        <p:spPr>
+          <a:xfrm>
+            <a:off x="7935402" y="743447"/>
+            <a:ext cx="3862151" cy="3692028"/>
+          </a:xfrm>
+          <a:noFill/>
+        </p:spPr>
+        <p:txBody>
+          <a:bodyPr>
+            <a:normAutofit fontScale="90000"/>
+          </a:bodyPr>
+          <a:lstStyle/>
+          <a:p>
+            <a:pPr algn="l"/>
+            <a:r>
+              <a:rPr lang="pl-PL" sz="5200" noProof="0" dirty="0"/>
+              <a:t>System Informatyczny dla Sieci Hoteli </a:t>
+            </a:r>
+            <a:r>
+              <a:rPr lang="en-US" sz="5200" noProof="0" dirty="0"/>
+              <a:t>X-Hotels</a:t>
+            </a:r>
+            <a:endParaRPr lang="pl-PL" sz="5200" noProof="0" dirty="0"/>
           </a:p>
         </p:txBody>
       </p:sp>
@@ -4771,19 +4086,37 @@
             <p:ph type="subTitle" idx="1"/>
           </p:nvPr>
         </p:nvSpPr>
-        <p:spPr/>
+        <p:spPr>
+          <a:xfrm>
+            <a:off x="7935403" y="4629234"/>
+            <a:ext cx="3445766" cy="1485319"/>
+          </a:xfrm>
+          <a:noFill/>
+        </p:spPr>
         <p:txBody>
           <a:bodyPr>
-            <a:normAutofit fontScale="92500" lnSpcReduction="20000"/>
+            <a:normAutofit/>
           </a:bodyPr>
           <a:lstStyle/>
           <a:p>
-            <a:r>
+            <a:pPr algn="l">
+              <a:lnSpc>
+                <a:spcPct val="90000"/>
+              </a:lnSpc>
+            </a:pPr>
+            <a:r>
+              <a:rPr lang="pl-PL" sz="2000" noProof="0"/>
               <a:t>Nowy standard obsługi gościa - Prezentacja Projektu</a:t>
             </a:r>
           </a:p>
           <a:p>
-            <a:r>
+            <a:pPr algn="l">
+              <a:lnSpc>
+                <a:spcPct val="90000"/>
+              </a:lnSpc>
+            </a:pPr>
+            <a:r>
+              <a:rPr lang="pl-PL" sz="2000" noProof="0"/>
               <a:t>Autorzy: Maciej Modzelewski, Jakub Wrzosek</a:t>
             </a:r>
           </a:p>
@@ -4794,12 +4127,32 @@
   <p:clrMapOvr>
     <a:masterClrMapping/>
   </p:clrMapOvr>
+  <mc:AlternateContent xmlns:mc="http://schemas.openxmlformats.org/markup-compatibility/2006">
+    <mc:Choice xmlns:p159="http://schemas.microsoft.com/office/powerpoint/2015/09/main" Requires="p159">
+      <p:transition spd="slow">
+        <p159:morph option="byObject"/>
+      </p:transition>
+    </mc:Choice>
+    <mc:Fallback>
+      <p:transition spd="slow">
+        <p:fade/>
+      </p:transition>
+    </mc:Fallback>
+  </mc:AlternateContent>
 </p:sld>
 </file>
 
 <file path=ppt/slides/slide2.xml><?xml version="1.0" encoding="utf-8"?>
 <p:sld xmlns:a="http://schemas.openxmlformats.org/drawingml/2006/main" xmlns:r="http://schemas.openxmlformats.org/officeDocument/2006/relationships" xmlns:p="http://schemas.openxmlformats.org/presentationml/2006/main">
   <p:cSld>
+    <p:bg>
+      <p:bgPr>
+        <a:solidFill>
+          <a:schemeClr val="bg1"/>
+        </a:solidFill>
+        <a:effectLst/>
+      </p:bgPr>
+    </p:bg>
     <p:spTree>
       <p:nvGrpSpPr>
         <p:cNvPr id="1" name=""/>
@@ -4814,6 +4167,317 @@
           <a:chExt cx="0" cy="0"/>
         </a:xfrm>
       </p:grpSpPr>
+      <p:pic>
+        <p:nvPicPr>
+          <p:cNvPr id="6" name="Obraz 5">
+            <a:extLst>
+              <a:ext uri="{FF2B5EF4-FFF2-40B4-BE49-F238E27FC236}">
+                <a16:creationId xmlns:a16="http://schemas.microsoft.com/office/drawing/2014/main" id="{61ED79AB-9F22-8E01-C755-AD321AAA3F75}"/>
+              </a:ext>
+            </a:extLst>
+          </p:cNvPr>
+          <p:cNvPicPr>
+            <a:picLocks noGrp="1" noRot="1" noChangeAspect="1" noMove="1" noResize="1" noEditPoints="1" noAdjustHandles="1" noChangeArrowheads="1" noChangeShapeType="1" noCrop="1"/>
+          </p:cNvPicPr>
+          <p:nvPr/>
+        </p:nvPicPr>
+        <p:blipFill>
+          <a:blip r:embed="rId3">
+            <a:alphaModFix amt="0"/>
+          </a:blip>
+          <a:srcRect l="14739" r="5950"/>
+          <a:stretch>
+            <a:fillRect/>
+          </a:stretch>
+        </p:blipFill>
+        <p:spPr>
+          <a:xfrm>
+            <a:off x="0" y="0"/>
+            <a:ext cx="9669642" cy="6857990"/>
+          </a:xfrm>
+          <a:prstGeom prst="rect">
+            <a:avLst/>
+          </a:prstGeom>
+        </p:spPr>
+      </p:pic>
+      <p:sp>
+        <p:nvSpPr>
+          <p:cNvPr id="9" name="Rectangle 19">
+            <a:extLst>
+              <a:ext uri="{FF2B5EF4-FFF2-40B4-BE49-F238E27FC236}">
+                <a16:creationId xmlns:a16="http://schemas.microsoft.com/office/drawing/2014/main" id="{58B3FC34-D3C1-71EF-F6D2-213DCBE860E8}"/>
+              </a:ext>
+              <a:ext uri="{C183D7F6-B498-43B3-948B-1728B52AA6E4}">
+                <adec:decorative xmlns:adec="http://schemas.microsoft.com/office/drawing/2017/decorative" val="1"/>
+              </a:ext>
+            </a:extLst>
+          </p:cNvPr>
+          <p:cNvSpPr/>
+          <p:nvPr>
+            <p:extLst>
+              <p:ext uri="{386F3935-93C4-4BCD-93E2-E3B085C9AB24}">
+                <p16:designElem xmlns:p16="http://schemas.microsoft.com/office/powerpoint/2015/main" val="1"/>
+              </p:ext>
+            </p:extLst>
+          </p:nvPr>
+        </p:nvSpPr>
+        <p:spPr>
+          <a:xfrm flipH="1">
+            <a:off x="5125019" y="0"/>
+            <a:ext cx="7066978" cy="6858000"/>
+          </a:xfrm>
+          <a:prstGeom prst="rect">
+            <a:avLst/>
+          </a:prstGeom>
+          <a:gradFill>
+            <a:gsLst>
+              <a:gs pos="48000">
+                <a:schemeClr val="bg1"/>
+              </a:gs>
+              <a:gs pos="35000">
+                <a:schemeClr val="bg1">
+                  <a:alpha val="77000"/>
+                </a:schemeClr>
+              </a:gs>
+              <a:gs pos="19000">
+                <a:schemeClr val="bg1">
+                  <a:alpha val="38000"/>
+                </a:schemeClr>
+              </a:gs>
+              <a:gs pos="0">
+                <a:schemeClr val="bg1">
+                  <a:alpha val="0"/>
+                </a:schemeClr>
+              </a:gs>
+              <a:gs pos="100000">
+                <a:schemeClr val="bg1"/>
+              </a:gs>
+            </a:gsLst>
+            <a:lin ang="10800000" scaled="0"/>
+          </a:gradFill>
+          <a:ln>
+            <a:noFill/>
+          </a:ln>
+        </p:spPr>
+        <p:style>
+          <a:lnRef idx="2">
+            <a:schemeClr val="accent1">
+              <a:shade val="50000"/>
+            </a:schemeClr>
+          </a:lnRef>
+          <a:fillRef idx="1">
+            <a:schemeClr val="accent1"/>
+          </a:fillRef>
+          <a:effectRef idx="0">
+            <a:schemeClr val="accent1"/>
+          </a:effectRef>
+          <a:fontRef idx="minor">
+            <a:schemeClr val="lt1"/>
+          </a:fontRef>
+        </p:style>
+        <p:txBody>
+          <a:bodyPr rtlCol="0" anchor="ctr"/>
+          <a:lstStyle/>
+          <a:p>
+            <a:pPr algn="ctr"/>
+            <a:endParaRPr lang="en-US" dirty="0"/>
+          </a:p>
+        </p:txBody>
+      </p:sp>
+      <p:sp useBgFill="1">
+        <p:nvSpPr>
+          <p:cNvPr id="8" name="Rectangle 7">
+            <a:extLst>
+              <a:ext uri="{FF2B5EF4-FFF2-40B4-BE49-F238E27FC236}">
+                <a16:creationId xmlns:a16="http://schemas.microsoft.com/office/drawing/2014/main" id="{907EF6B7-1338-4443-8C46-6A318D952DFD}"/>
+              </a:ext>
+              <a:ext uri="{C183D7F6-B498-43B3-948B-1728B52AA6E4}">
+                <adec:decorative xmlns:adec="http://schemas.microsoft.com/office/drawing/2017/decorative" val="1"/>
+              </a:ext>
+            </a:extLst>
+          </p:cNvPr>
+          <p:cNvSpPr>
+            <a:spLocks noGrp="1" noRot="1" noChangeAspect="1" noMove="1" noResize="1" noEditPoints="1" noAdjustHandles="1" noChangeArrowheads="1" noChangeShapeType="1" noTextEdit="1"/>
+          </p:cNvSpPr>
+          <p:nvPr>
+            <p:extLst>
+              <p:ext uri="{386F3935-93C4-4BCD-93E2-E3B085C9AB24}">
+                <p16:designElem xmlns:p16="http://schemas.microsoft.com/office/powerpoint/2015/main" val="1"/>
+              </p:ext>
+            </p:extLst>
+          </p:nvPr>
+        </p:nvSpPr>
+        <p:spPr>
+          <a:xfrm>
+            <a:off x="3048" y="0"/>
+            <a:ext cx="12188952" cy="6858000"/>
+          </a:xfrm>
+          <a:prstGeom prst="rect">
+            <a:avLst/>
+          </a:prstGeom>
+          <a:ln>
+            <a:noFill/>
+          </a:ln>
+        </p:spPr>
+        <p:style>
+          <a:lnRef idx="2">
+            <a:schemeClr val="accent1">
+              <a:shade val="50000"/>
+            </a:schemeClr>
+          </a:lnRef>
+          <a:fillRef idx="1">
+            <a:schemeClr val="accent1"/>
+          </a:fillRef>
+          <a:effectRef idx="0">
+            <a:schemeClr val="accent1"/>
+          </a:effectRef>
+          <a:fontRef idx="minor">
+            <a:schemeClr val="lt1"/>
+          </a:fontRef>
+        </p:style>
+        <p:txBody>
+          <a:bodyPr rtlCol="0" anchor="ctr"/>
+          <a:lstStyle/>
+          <a:p>
+            <a:pPr algn="ctr"/>
+            <a:endParaRPr lang="en-US"/>
+          </a:p>
+        </p:txBody>
+      </p:sp>
+      <p:sp>
+        <p:nvSpPr>
+          <p:cNvPr id="10" name="Freeform: Shape 9">
+            <a:extLst>
+              <a:ext uri="{FF2B5EF4-FFF2-40B4-BE49-F238E27FC236}">
+                <a16:creationId xmlns:a16="http://schemas.microsoft.com/office/drawing/2014/main" id="{DAAE4CDD-124C-4DCF-9584-B6033B545DD5}"/>
+              </a:ext>
+              <a:ext uri="{C183D7F6-B498-43B3-948B-1728B52AA6E4}">
+                <adec:decorative xmlns:adec="http://schemas.microsoft.com/office/drawing/2017/decorative" val="1"/>
+              </a:ext>
+            </a:extLst>
+          </p:cNvPr>
+          <p:cNvSpPr>
+            <a:spLocks noGrp="1" noRot="1" noChangeAspect="1" noMove="1" noResize="1" noEditPoints="1" noAdjustHandles="1" noChangeArrowheads="1" noChangeShapeType="1" noTextEdit="1"/>
+          </p:cNvSpPr>
+          <p:nvPr>
+            <p:extLst>
+              <p:ext uri="{386F3935-93C4-4BCD-93E2-E3B085C9AB24}">
+                <p16:designElem xmlns:p16="http://schemas.microsoft.com/office/powerpoint/2015/main" val="1"/>
+              </p:ext>
+            </p:extLst>
+          </p:nvPr>
+        </p:nvSpPr>
+        <p:spPr>
+          <a:xfrm>
+            <a:off x="1" y="0"/>
+            <a:ext cx="4167271" cy="6858000"/>
+          </a:xfrm>
+          <a:custGeom>
+            <a:avLst/>
+            <a:gdLst>
+              <a:gd name="connsiteX0" fmla="*/ 0 w 4167271"/>
+              <a:gd name="connsiteY0" fmla="*/ 0 h 6858000"/>
+              <a:gd name="connsiteX1" fmla="*/ 2259550 w 4167271"/>
+              <a:gd name="connsiteY1" fmla="*/ 0 h 6858000"/>
+              <a:gd name="connsiteX2" fmla="*/ 2387803 w 4167271"/>
+              <a:gd name="connsiteY2" fmla="*/ 82222 h 6858000"/>
+              <a:gd name="connsiteX3" fmla="*/ 4167271 w 4167271"/>
+              <a:gd name="connsiteY3" fmla="*/ 3429000 h 6858000"/>
+              <a:gd name="connsiteX4" fmla="*/ 2387803 w 4167271"/>
+              <a:gd name="connsiteY4" fmla="*/ 6775779 h 6858000"/>
+              <a:gd name="connsiteX5" fmla="*/ 2259550 w 4167271"/>
+              <a:gd name="connsiteY5" fmla="*/ 6858000 h 6858000"/>
+              <a:gd name="connsiteX6" fmla="*/ 0 w 4167271"/>
+              <a:gd name="connsiteY6" fmla="*/ 6858000 h 6858000"/>
+            </a:gdLst>
+            <a:ahLst/>
+            <a:cxnLst>
+              <a:cxn ang="0">
+                <a:pos x="connsiteX0" y="connsiteY0"/>
+              </a:cxn>
+              <a:cxn ang="0">
+                <a:pos x="connsiteX1" y="connsiteY1"/>
+              </a:cxn>
+              <a:cxn ang="0">
+                <a:pos x="connsiteX2" y="connsiteY2"/>
+              </a:cxn>
+              <a:cxn ang="0">
+                <a:pos x="connsiteX3" y="connsiteY3"/>
+              </a:cxn>
+              <a:cxn ang="0">
+                <a:pos x="connsiteX4" y="connsiteY4"/>
+              </a:cxn>
+              <a:cxn ang="0">
+                <a:pos x="connsiteX5" y="connsiteY5"/>
+              </a:cxn>
+              <a:cxn ang="0">
+                <a:pos x="connsiteX6" y="connsiteY6"/>
+              </a:cxn>
+            </a:cxnLst>
+            <a:rect l="l" t="t" r="r" b="b"/>
+            <a:pathLst>
+              <a:path w="4167271" h="6858000">
+                <a:moveTo>
+                  <a:pt x="0" y="0"/>
+                </a:moveTo>
+                <a:lnTo>
+                  <a:pt x="2259550" y="0"/>
+                </a:lnTo>
+                <a:lnTo>
+                  <a:pt x="2387803" y="82222"/>
+                </a:lnTo>
+                <a:cubicBezTo>
+                  <a:pt x="3461407" y="807534"/>
+                  <a:pt x="4167271" y="2035835"/>
+                  <a:pt x="4167271" y="3429000"/>
+                </a:cubicBezTo>
+                <a:cubicBezTo>
+                  <a:pt x="4167271" y="4822165"/>
+                  <a:pt x="3461407" y="6050467"/>
+                  <a:pt x="2387803" y="6775779"/>
+                </a:cubicBezTo>
+                <a:lnTo>
+                  <a:pt x="2259550" y="6858000"/>
+                </a:lnTo>
+                <a:lnTo>
+                  <a:pt x="0" y="6858000"/>
+                </a:lnTo>
+                <a:close/>
+              </a:path>
+            </a:pathLst>
+          </a:custGeom>
+          <a:solidFill>
+            <a:schemeClr val="accent2"/>
+          </a:solidFill>
+          <a:ln>
+            <a:noFill/>
+          </a:ln>
+        </p:spPr>
+        <p:style>
+          <a:lnRef idx="2">
+            <a:schemeClr val="accent1">
+              <a:shade val="50000"/>
+            </a:schemeClr>
+          </a:lnRef>
+          <a:fillRef idx="1">
+            <a:schemeClr val="accent1"/>
+          </a:fillRef>
+          <a:effectRef idx="0">
+            <a:schemeClr val="accent1"/>
+          </a:effectRef>
+          <a:fontRef idx="minor">
+            <a:schemeClr val="lt1"/>
+          </a:fontRef>
+        </p:style>
+        <p:txBody>
+          <a:bodyPr rtlCol="0" anchor="ctr"/>
+          <a:lstStyle/>
+          <a:p>
+            <a:pPr algn="ctr"/>
+            <a:endParaRPr lang="en-US"/>
+          </a:p>
+        </p:txBody>
+      </p:sp>
       <p:sp>
         <p:nvSpPr>
           <p:cNvPr id="2" name="Title 1"/>
@@ -4824,32 +4488,87 @@
             <p:ph type="title"/>
           </p:nvPr>
         </p:nvSpPr>
-        <p:spPr/>
-        <p:txBody>
-          <a:bodyPr/>
-          <a:lstStyle/>
-          <a:p>
-            <a:r>
-              <a:rPr dirty="0" err="1"/>
-              <a:t>Rzeczywistość</a:t>
-            </a:r>
-            <a:r>
-              <a:rPr dirty="0"/>
-              <a:t> </a:t>
-            </a:r>
-            <a:r>
-              <a:rPr dirty="0" err="1"/>
-              <a:t>dzisiejszych</a:t>
-            </a:r>
-            <a:r>
-              <a:rPr dirty="0"/>
-              <a:t> </a:t>
-            </a:r>
-            <a:r>
-              <a:rPr dirty="0" err="1"/>
-              <a:t>hoteli</a:t>
-            </a:r>
-            <a:endParaRPr dirty="0"/>
+        <p:spPr>
+          <a:xfrm>
+            <a:off x="686834" y="1153572"/>
+            <a:ext cx="3200400" cy="4461163"/>
+          </a:xfrm>
+        </p:spPr>
+        <p:txBody>
+          <a:bodyPr>
+            <a:normAutofit/>
+          </a:bodyPr>
+          <a:lstStyle/>
+          <a:p>
+            <a:r>
+              <a:rPr lang="pl-PL" sz="4100" noProof="0" dirty="0">
+                <a:solidFill>
+                  <a:srgbClr val="FFFFFF"/>
+                </a:solidFill>
+              </a:rPr>
+              <a:t>Rzeczywistość dzisiejszych hoteli</a:t>
+            </a:r>
+          </a:p>
+        </p:txBody>
+      </p:sp>
+      <p:sp>
+        <p:nvSpPr>
+          <p:cNvPr id="12" name="Arc 11">
+            <a:extLst>
+              <a:ext uri="{FF2B5EF4-FFF2-40B4-BE49-F238E27FC236}">
+                <a16:creationId xmlns:a16="http://schemas.microsoft.com/office/drawing/2014/main" id="{081E4A58-353D-44AE-B2FC-2A74E2E400F7}"/>
+              </a:ext>
+              <a:ext uri="{C183D7F6-B498-43B3-948B-1728B52AA6E4}">
+                <adec:decorative xmlns:adec="http://schemas.microsoft.com/office/drawing/2017/decorative" val="1"/>
+              </a:ext>
+            </a:extLst>
+          </p:cNvPr>
+          <p:cNvSpPr>
+            <a:spLocks noGrp="1" noRot="1" noChangeAspect="1" noMove="1" noResize="1" noEditPoints="1" noAdjustHandles="1" noChangeArrowheads="1" noChangeShapeType="1" noTextEdit="1"/>
+          </p:cNvSpPr>
+          <p:nvPr>
+            <p:extLst>
+              <p:ext uri="{386F3935-93C4-4BCD-93E2-E3B085C9AB24}">
+                <p16:designElem xmlns:p16="http://schemas.microsoft.com/office/powerpoint/2015/main" val="1"/>
+              </p:ext>
+            </p:extLst>
+          </p:nvPr>
+        </p:nvSpPr>
+        <p:spPr>
+          <a:xfrm flipV="1">
+            <a:off x="7550402" y="2455479"/>
+            <a:ext cx="4083433" cy="4083433"/>
+          </a:xfrm>
+          <a:prstGeom prst="arc">
+            <a:avLst/>
+          </a:prstGeom>
+          <a:ln w="127000" cap="rnd">
+            <a:solidFill>
+              <a:schemeClr val="accent4"/>
+            </a:solidFill>
+            <a:prstDash val="dash"/>
+          </a:ln>
+        </p:spPr>
+        <p:style>
+          <a:lnRef idx="1">
+            <a:schemeClr val="accent1"/>
+          </a:lnRef>
+          <a:fillRef idx="0">
+            <a:schemeClr val="accent1"/>
+          </a:fillRef>
+          <a:effectRef idx="0">
+            <a:schemeClr val="accent1"/>
+          </a:effectRef>
+          <a:fontRef idx="minor">
+            <a:schemeClr val="tx1"/>
+          </a:fontRef>
+        </p:style>
+        <p:txBody>
+          <a:bodyPr rtlCol="0" anchor="ctr"/>
+          <a:lstStyle/>
+          <a:p>
+            <a:pPr algn="ctr"/>
+            <a:endParaRPr lang="en-US" dirty="0"/>
           </a:p>
         </p:txBody>
       </p:sp>
@@ -4863,234 +4582,57 @@
             <p:ph idx="1"/>
           </p:nvPr>
         </p:nvSpPr>
-        <p:spPr/>
-        <p:txBody>
-          <a:bodyPr/>
-          <a:lstStyle/>
-          <a:p>
-            <a:r>
-              <a:rPr dirty="0"/>
-              <a:t>Z </a:t>
-            </a:r>
-            <a:r>
-              <a:rPr dirty="0" err="1"/>
-              <a:t>czym</a:t>
-            </a:r>
-            <a:r>
-              <a:rPr dirty="0"/>
-              <a:t> </a:t>
-            </a:r>
-            <a:r>
-              <a:rPr dirty="0" err="1"/>
-              <a:t>mierzy</a:t>
-            </a:r>
-            <a:r>
-              <a:rPr dirty="0"/>
-              <a:t> </a:t>
-            </a:r>
-            <a:r>
-              <a:rPr dirty="0" err="1"/>
-              <a:t>się</a:t>
-            </a:r>
-            <a:r>
-              <a:rPr dirty="0"/>
-              <a:t> </a:t>
-            </a:r>
-            <a:r>
-              <a:rPr dirty="0" err="1"/>
-              <a:t>branża</a:t>
-            </a:r>
-            <a:r>
-              <a:rPr dirty="0"/>
-              <a:t> </a:t>
-            </a:r>
-            <a:r>
-              <a:rPr dirty="0" err="1"/>
-              <a:t>i</a:t>
-            </a:r>
-            <a:r>
-              <a:rPr dirty="0"/>
-              <a:t> </a:t>
-            </a:r>
-            <a:r>
-              <a:rPr dirty="0" err="1"/>
-              <a:t>goście</a:t>
-            </a:r>
-            <a:r>
-              <a:rPr dirty="0"/>
-              <a:t>?</a:t>
+        <p:spPr>
+          <a:xfrm>
+            <a:off x="4447308" y="591344"/>
+            <a:ext cx="6906491" cy="5585619"/>
+          </a:xfrm>
+        </p:spPr>
+        <p:txBody>
+          <a:bodyPr anchor="ctr">
+            <a:normAutofit/>
+          </a:bodyPr>
+          <a:lstStyle/>
+          <a:p>
+            <a:r>
+              <a:rPr lang="pl-PL" noProof="0" dirty="0"/>
+              <a:t>Z czym mierzy się branża i goście?</a:t>
             </a:r>
           </a:p>
           <a:p>
             <a:pPr lvl="1"/>
             <a:r>
-              <a:rPr dirty="0" err="1"/>
-              <a:t>Zirytowani</a:t>
-            </a:r>
-            <a:r>
-              <a:rPr dirty="0"/>
-              <a:t> </a:t>
-            </a:r>
-            <a:r>
-              <a:rPr dirty="0" err="1"/>
-              <a:t>goście</a:t>
-            </a:r>
-            <a:r>
-              <a:rPr dirty="0"/>
-              <a:t> w </a:t>
-            </a:r>
-            <a:r>
-              <a:rPr dirty="0" err="1"/>
-              <a:t>długich</a:t>
-            </a:r>
-            <a:r>
-              <a:rPr dirty="0"/>
-              <a:t> </a:t>
-            </a:r>
-            <a:r>
-              <a:rPr dirty="0" err="1"/>
-              <a:t>kolejkach</a:t>
-            </a:r>
-            <a:r>
-              <a:rPr dirty="0"/>
-              <a:t> do </a:t>
-            </a:r>
-            <a:r>
-              <a:rPr dirty="0" err="1"/>
-              <a:t>zameldowania</a:t>
-            </a:r>
-            <a:r>
-              <a:rPr dirty="0"/>
-              <a:t>.</a:t>
+              <a:rPr lang="pl-PL" noProof="0" dirty="0"/>
+              <a:t>Zirytowani goście w długich kolejkach do zameldowania.</a:t>
             </a:r>
           </a:p>
           <a:p>
             <a:pPr lvl="1"/>
             <a:r>
-              <a:rPr dirty="0" err="1"/>
-              <a:t>Ryzyko</a:t>
-            </a:r>
-            <a:r>
-              <a:rPr dirty="0"/>
-              <a:t> </a:t>
-            </a:r>
-            <a:r>
-              <a:rPr dirty="0" err="1"/>
-              <a:t>nadrezerwacji</a:t>
-            </a:r>
-            <a:r>
-              <a:rPr dirty="0"/>
-              <a:t> (overbooking) </a:t>
-            </a:r>
-            <a:r>
-              <a:rPr dirty="0" err="1"/>
-              <a:t>przez</a:t>
-            </a:r>
-            <a:r>
-              <a:rPr dirty="0"/>
-              <a:t> </a:t>
-            </a:r>
-            <a:r>
-              <a:rPr dirty="0" err="1"/>
-              <a:t>opóźnienia</a:t>
-            </a:r>
-            <a:r>
-              <a:rPr dirty="0"/>
-              <a:t> w </a:t>
-            </a:r>
-            <a:r>
-              <a:rPr dirty="0" err="1"/>
-              <a:t>synchronizacji</a:t>
-            </a:r>
-            <a:r>
-              <a:rPr dirty="0"/>
-              <a:t>.</a:t>
+              <a:rPr lang="pl-PL" noProof="0" dirty="0"/>
+              <a:t>Ryzyko nadrezerwacji (</a:t>
+            </a:r>
+            <a:r>
+              <a:rPr lang="en-US" noProof="0" dirty="0"/>
+              <a:t>overbooking</a:t>
+            </a:r>
+            <a:r>
+              <a:rPr lang="pl-PL" noProof="0" dirty="0"/>
+              <a:t>) przez opóźnienia w synchronizacji.</a:t>
             </a:r>
           </a:p>
           <a:p>
             <a:pPr lvl="1"/>
             <a:r>
-              <a:rPr dirty="0"/>
-              <a:t>Chaos </a:t>
-            </a:r>
-            <a:r>
-              <a:rPr dirty="0" err="1"/>
-              <a:t>informacyjny</a:t>
-            </a:r>
-            <a:r>
-              <a:rPr dirty="0"/>
-              <a:t> - </a:t>
-            </a:r>
-            <a:r>
-              <a:rPr dirty="0" err="1"/>
-              <a:t>niespójne</a:t>
-            </a:r>
-            <a:r>
-              <a:rPr dirty="0"/>
-              <a:t> </a:t>
-            </a:r>
-            <a:r>
-              <a:rPr dirty="0" err="1"/>
-              <a:t>dane</a:t>
-            </a:r>
-            <a:r>
-              <a:rPr dirty="0"/>
-              <a:t> </a:t>
-            </a:r>
-            <a:r>
-              <a:rPr dirty="0" err="1"/>
-              <a:t>między</a:t>
-            </a:r>
-            <a:r>
-              <a:rPr dirty="0"/>
-              <a:t> </a:t>
-            </a:r>
-            <a:r>
-              <a:rPr dirty="0" err="1"/>
-              <a:t>stroną</a:t>
-            </a:r>
-            <a:r>
-              <a:rPr dirty="0"/>
-              <a:t> www a </a:t>
-            </a:r>
-            <a:r>
-              <a:rPr dirty="0" err="1"/>
-              <a:t>recepcją</a:t>
-            </a:r>
-            <a:r>
-              <a:rPr dirty="0"/>
-              <a:t>.</a:t>
+              <a:rPr lang="pl-PL" noProof="0" dirty="0"/>
+              <a:t>Chaos informacyjny - niespójne dane między stroną www a recepcją.</a:t>
             </a:r>
           </a:p>
           <a:p>
             <a:pPr lvl="1"/>
             <a:r>
-              <a:rPr dirty="0"/>
-              <a:t>Brak </a:t>
-            </a:r>
-            <a:r>
-              <a:rPr dirty="0" err="1"/>
-              <a:t>nowoczesnej</a:t>
-            </a:r>
-            <a:r>
-              <a:rPr dirty="0"/>
-              <a:t> </a:t>
-            </a:r>
-            <a:r>
-              <a:rPr dirty="0" err="1"/>
-              <a:t>chmurowej</a:t>
-            </a:r>
-            <a:r>
-              <a:rPr dirty="0"/>
-              <a:t> </a:t>
-            </a:r>
-            <a:r>
-              <a:rPr dirty="0" err="1"/>
-              <a:t>infrastruktury</a:t>
-            </a:r>
-            <a:r>
-              <a:rPr dirty="0"/>
-              <a:t>.</a:t>
+              <a:rPr lang="pl-PL" noProof="0" dirty="0"/>
+              <a:t>Brak nowoczesnej chmurowej infrastruktury.</a:t>
             </a:r>
           </a:p>
         </p:txBody>
@@ -5100,12 +4642,32 @@
   <p:clrMapOvr>
     <a:masterClrMapping/>
   </p:clrMapOvr>
+  <mc:AlternateContent xmlns:mc="http://schemas.openxmlformats.org/markup-compatibility/2006">
+    <mc:Choice xmlns:p159="http://schemas.microsoft.com/office/powerpoint/2015/09/main" Requires="p159">
+      <p:transition spd="slow">
+        <p159:morph option="byObject"/>
+      </p:transition>
+    </mc:Choice>
+    <mc:Fallback>
+      <p:transition spd="slow">
+        <p:fade/>
+      </p:transition>
+    </mc:Fallback>
+  </mc:AlternateContent>
 </p:sld>
 </file>
 
 <file path=ppt/slides/slide3.xml><?xml version="1.0" encoding="utf-8"?>
 <p:sld xmlns:a="http://schemas.openxmlformats.org/drawingml/2006/main" xmlns:r="http://schemas.openxmlformats.org/officeDocument/2006/relationships" xmlns:p="http://schemas.openxmlformats.org/presentationml/2006/main">
   <p:cSld>
+    <p:bg>
+      <p:bgPr>
+        <a:solidFill>
+          <a:schemeClr val="bg1"/>
+        </a:solidFill>
+        <a:effectLst/>
+      </p:bgPr>
+    </p:bg>
     <p:spTree>
       <p:nvGrpSpPr>
         <p:cNvPr id="1" name=""/>
@@ -5120,6 +4682,127 @@
           <a:chExt cx="0" cy="0"/>
         </a:xfrm>
       </p:grpSpPr>
+      <p:sp useBgFill="1">
+        <p:nvSpPr>
+          <p:cNvPr id="8" name="Rectangle 7">
+            <a:extLst>
+              <a:ext uri="{FF2B5EF4-FFF2-40B4-BE49-F238E27FC236}">
+                <a16:creationId xmlns:a16="http://schemas.microsoft.com/office/drawing/2014/main" id="{389575E1-3389-451A-A5F7-27854C25C599}"/>
+              </a:ext>
+              <a:ext uri="{C183D7F6-B498-43B3-948B-1728B52AA6E4}">
+                <adec:decorative xmlns:adec="http://schemas.microsoft.com/office/drawing/2017/decorative" val="1"/>
+              </a:ext>
+            </a:extLst>
+          </p:cNvPr>
+          <p:cNvSpPr>
+            <a:spLocks noGrp="1" noRot="1" noChangeAspect="1" noMove="1" noResize="1" noEditPoints="1" noAdjustHandles="1" noChangeArrowheads="1" noChangeShapeType="1" noTextEdit="1"/>
+          </p:cNvSpPr>
+          <p:nvPr>
+            <p:extLst>
+              <p:ext uri="{386F3935-93C4-4BCD-93E2-E3B085C9AB24}">
+                <p16:designElem xmlns:p16="http://schemas.microsoft.com/office/powerpoint/2015/main" val="1"/>
+              </p:ext>
+            </p:extLst>
+          </p:nvPr>
+        </p:nvSpPr>
+        <p:spPr>
+          <a:xfrm>
+            <a:off x="3048" y="4293"/>
+            <a:ext cx="12188952" cy="6858000"/>
+          </a:xfrm>
+          <a:prstGeom prst="rect">
+            <a:avLst/>
+          </a:prstGeom>
+          <a:ln>
+            <a:noFill/>
+          </a:ln>
+        </p:spPr>
+        <p:style>
+          <a:lnRef idx="2">
+            <a:schemeClr val="accent1">
+              <a:shade val="50000"/>
+            </a:schemeClr>
+          </a:lnRef>
+          <a:fillRef idx="1">
+            <a:schemeClr val="accent1"/>
+          </a:fillRef>
+          <a:effectRef idx="0">
+            <a:schemeClr val="accent1"/>
+          </a:effectRef>
+          <a:fontRef idx="minor">
+            <a:schemeClr val="lt1"/>
+          </a:fontRef>
+        </p:style>
+        <p:txBody>
+          <a:bodyPr rtlCol="0" anchor="ctr"/>
+          <a:lstStyle/>
+          <a:p>
+            <a:pPr algn="ctr"/>
+            <a:endParaRPr lang="en-US"/>
+          </a:p>
+        </p:txBody>
+      </p:sp>
+      <p:sp>
+        <p:nvSpPr>
+          <p:cNvPr id="9" name="Rectangle 9">
+            <a:extLst>
+              <a:ext uri="{FF2B5EF4-FFF2-40B4-BE49-F238E27FC236}">
+                <a16:creationId xmlns:a16="http://schemas.microsoft.com/office/drawing/2014/main" id="{62B253EC-5BFA-672B-DB1F-8185D554237B}"/>
+              </a:ext>
+              <a:ext uri="{C183D7F6-B498-43B3-948B-1728B52AA6E4}">
+                <adec:decorative xmlns:adec="http://schemas.microsoft.com/office/drawing/2017/decorative" val="1"/>
+              </a:ext>
+            </a:extLst>
+          </p:cNvPr>
+          <p:cNvSpPr/>
+          <p:nvPr>
+            <p:extLst>
+              <p:ext uri="{386F3935-93C4-4BCD-93E2-E3B085C9AB24}">
+                <p16:designElem xmlns:p16="http://schemas.microsoft.com/office/powerpoint/2015/main" val="1"/>
+              </p:ext>
+            </p:extLst>
+          </p:nvPr>
+        </p:nvSpPr>
+        <p:spPr>
+          <a:xfrm>
+            <a:off x="4" y="4289"/>
+            <a:ext cx="4167268" cy="6858004"/>
+          </a:xfrm>
+          <a:prstGeom prst="rect">
+            <a:avLst/>
+          </a:prstGeom>
+          <a:solidFill>
+            <a:schemeClr val="accent2"/>
+          </a:solidFill>
+          <a:ln>
+            <a:noFill/>
+          </a:ln>
+        </p:spPr>
+        <p:style>
+          <a:lnRef idx="2">
+            <a:schemeClr val="accent1">
+              <a:shade val="50000"/>
+            </a:schemeClr>
+          </a:lnRef>
+          <a:fillRef idx="1">
+            <a:schemeClr val="accent1"/>
+          </a:fillRef>
+          <a:effectRef idx="0">
+            <a:schemeClr val="accent1"/>
+          </a:effectRef>
+          <a:fontRef idx="minor">
+            <a:schemeClr val="lt1"/>
+          </a:fontRef>
+        </p:style>
+        <p:txBody>
+          <a:bodyPr rtlCol="0" anchor="ctr"/>
+          <a:lstStyle/>
+          <a:p>
+            <a:pPr algn="ctr"/>
+            <a:endParaRPr lang="en-US"/>
+          </a:p>
+        </p:txBody>
+      </p:sp>
       <p:sp>
         <p:nvSpPr>
           <p:cNvPr id="2" name="Title 1"/>
@@ -5130,37 +4813,87 @@
             <p:ph type="title"/>
           </p:nvPr>
         </p:nvSpPr>
-        <p:spPr/>
+        <p:spPr>
+          <a:xfrm>
+            <a:off x="686834" y="591344"/>
+            <a:ext cx="3200400" cy="5585619"/>
+          </a:xfrm>
+        </p:spPr>
         <p:txBody>
           <a:bodyPr>
-            <a:normAutofit fontScale="90000"/>
+            <a:normAutofit/>
           </a:bodyPr>
           <a:lstStyle/>
           <a:p>
             <a:r>
-              <a:rPr dirty="0" err="1"/>
-              <a:t>Nasza</a:t>
-            </a:r>
-            <a:r>
-              <a:rPr dirty="0"/>
-              <a:t> </a:t>
-            </a:r>
-            <a:r>
-              <a:rPr dirty="0" err="1"/>
-              <a:t>Odpowiedź</a:t>
-            </a:r>
-            <a:r>
-              <a:rPr dirty="0"/>
-              <a:t>: </a:t>
-            </a:r>
-            <a:r>
-              <a:rPr dirty="0" err="1"/>
-              <a:t>Zintegrowany</a:t>
-            </a:r>
-            <a:r>
-              <a:rPr dirty="0"/>
-              <a:t> System X-Hotels</a:t>
-            </a:r>
+              <a:rPr lang="pl-PL" sz="4100" noProof="0">
+                <a:solidFill>
+                  <a:srgbClr val="FFFFFF"/>
+                </a:solidFill>
+              </a:rPr>
+              <a:t>Nasza Odpowiedź: Zintegrowany System X-Hotels</a:t>
+            </a:r>
+          </a:p>
+        </p:txBody>
+      </p:sp>
+      <p:sp>
+        <p:nvSpPr>
+          <p:cNvPr id="12" name="Arc 11">
+            <a:extLst>
+              <a:ext uri="{FF2B5EF4-FFF2-40B4-BE49-F238E27FC236}">
+                <a16:creationId xmlns:a16="http://schemas.microsoft.com/office/drawing/2014/main" id="{081E4A58-353D-44AE-B2FC-2A74E2E400F7}"/>
+              </a:ext>
+              <a:ext uri="{C183D7F6-B498-43B3-948B-1728B52AA6E4}">
+                <adec:decorative xmlns:adec="http://schemas.microsoft.com/office/drawing/2017/decorative" val="1"/>
+              </a:ext>
+            </a:extLst>
+          </p:cNvPr>
+          <p:cNvSpPr>
+            <a:spLocks noGrp="1" noRot="1" noChangeAspect="1" noMove="1" noResize="1" noEditPoints="1" noAdjustHandles="1" noChangeArrowheads="1" noChangeShapeType="1" noTextEdit="1"/>
+          </p:cNvSpPr>
+          <p:nvPr>
+            <p:extLst>
+              <p:ext uri="{386F3935-93C4-4BCD-93E2-E3B085C9AB24}">
+                <p16:designElem xmlns:p16="http://schemas.microsoft.com/office/powerpoint/2015/main" val="1"/>
+              </p:ext>
+            </p:extLst>
+          </p:nvPr>
+        </p:nvSpPr>
+        <p:spPr>
+          <a:xfrm flipV="1">
+            <a:off x="7550402" y="2455479"/>
+            <a:ext cx="4083433" cy="4083433"/>
+          </a:xfrm>
+          <a:prstGeom prst="arc">
+            <a:avLst/>
+          </a:prstGeom>
+          <a:ln w="127000" cap="rnd">
+            <a:solidFill>
+              <a:schemeClr val="accent4"/>
+            </a:solidFill>
+            <a:prstDash val="dash"/>
+          </a:ln>
+        </p:spPr>
+        <p:style>
+          <a:lnRef idx="1">
+            <a:schemeClr val="accent1"/>
+          </a:lnRef>
+          <a:fillRef idx="0">
+            <a:schemeClr val="accent1"/>
+          </a:fillRef>
+          <a:effectRef idx="0">
+            <a:schemeClr val="accent1"/>
+          </a:effectRef>
+          <a:fontRef idx="minor">
+            <a:schemeClr val="tx1"/>
+          </a:fontRef>
+        </p:style>
+        <p:txBody>
+          <a:bodyPr rtlCol="0" anchor="ctr"/>
+          <a:lstStyle/>
+          <a:p>
+            <a:pPr algn="ctr"/>
+            <a:endParaRPr lang="en-US" dirty="0"/>
           </a:p>
         </p:txBody>
       </p:sp>
@@ -5174,293 +4907,117 @@
             <p:ph idx="1"/>
           </p:nvPr>
         </p:nvSpPr>
-        <p:spPr/>
-        <p:txBody>
-          <a:bodyPr/>
-          <a:lstStyle/>
-          <a:p>
-            <a:r>
-              <a:rPr dirty="0" err="1"/>
-              <a:t>Kompleksowe</a:t>
-            </a:r>
-            <a:r>
-              <a:rPr dirty="0"/>
-              <a:t> </a:t>
-            </a:r>
-            <a:r>
-              <a:rPr dirty="0" err="1"/>
-              <a:t>rozwiązanie</a:t>
-            </a:r>
-            <a:r>
-              <a:rPr dirty="0"/>
-              <a:t> w </a:t>
-            </a:r>
-            <a:r>
-              <a:rPr dirty="0" err="1"/>
-              <a:t>jednym</a:t>
-            </a:r>
-            <a:r>
-              <a:rPr dirty="0"/>
-              <a:t> </a:t>
-            </a:r>
-            <a:r>
-              <a:rPr dirty="0" err="1"/>
-              <a:t>miejscu</a:t>
-            </a:r>
-            <a:r>
-              <a:rPr dirty="0"/>
-              <a:t>:</a:t>
+        <p:spPr>
+          <a:xfrm>
+            <a:off x="4447308" y="591344"/>
+            <a:ext cx="6906491" cy="5585619"/>
+          </a:xfrm>
+        </p:spPr>
+        <p:txBody>
+          <a:bodyPr anchor="ctr">
+            <a:normAutofit/>
+          </a:bodyPr>
+          <a:lstStyle/>
+          <a:p>
+            <a:r>
+              <a:rPr lang="pl-PL" noProof="0" dirty="0"/>
+              <a:t>Kompleksowe rozwiązanie w jednym miejscu:</a:t>
             </a:r>
           </a:p>
           <a:p>
             <a:pPr lvl="1"/>
             <a:r>
-              <a:rPr dirty="0" err="1"/>
-              <a:t>Nowoczesny</a:t>
-            </a:r>
-            <a:r>
-              <a:rPr dirty="0"/>
-              <a:t> </a:t>
-            </a:r>
-            <a:r>
-              <a:rPr dirty="0" err="1"/>
-              <a:t>moduł</a:t>
-            </a:r>
-            <a:r>
-              <a:rPr dirty="0"/>
-              <a:t> </a:t>
-            </a:r>
-            <a:r>
-              <a:rPr dirty="0" err="1"/>
-              <a:t>rezerwacji</a:t>
-            </a:r>
-            <a:r>
-              <a:rPr dirty="0"/>
-              <a:t> online </a:t>
-            </a:r>
-            <a:r>
-              <a:rPr dirty="0" err="1"/>
-              <a:t>dostępny</a:t>
-            </a:r>
-            <a:r>
-              <a:rPr dirty="0"/>
-              <a:t> 24/7 </a:t>
-            </a:r>
-            <a:r>
-              <a:rPr dirty="0" err="1"/>
-              <a:t>dla</a:t>
-            </a:r>
-            <a:r>
-              <a:rPr dirty="0"/>
-              <a:t> </a:t>
-            </a:r>
-            <a:r>
-              <a:rPr dirty="0" err="1"/>
-              <a:t>Gościa</a:t>
-            </a:r>
-            <a:r>
-              <a:rPr dirty="0"/>
-              <a:t>.</a:t>
+              <a:rPr lang="pl-PL" noProof="0" dirty="0"/>
+              <a:t>Nowoczesny moduł rezerwacji online dostępny 24/7 dla Gościa.</a:t>
             </a:r>
           </a:p>
           <a:p>
             <a:pPr lvl="1"/>
             <a:r>
-              <a:rPr dirty="0" err="1"/>
-              <a:t>Przejrzysty</a:t>
-            </a:r>
-            <a:r>
-              <a:rPr dirty="0"/>
-              <a:t> </a:t>
-            </a:r>
-            <a:r>
-              <a:rPr dirty="0" err="1"/>
-              <a:t>i</a:t>
-            </a:r>
-            <a:r>
-              <a:rPr dirty="0"/>
-              <a:t> </a:t>
-            </a:r>
-            <a:r>
-              <a:rPr dirty="0" err="1"/>
-              <a:t>szybki</a:t>
-            </a:r>
-            <a:r>
-              <a:rPr dirty="0"/>
-              <a:t> panel </a:t>
-            </a:r>
-            <a:r>
-              <a:rPr dirty="0" err="1"/>
-              <a:t>zarządzania</a:t>
-            </a:r>
-            <a:r>
-              <a:rPr dirty="0"/>
-              <a:t> </a:t>
-            </a:r>
-            <a:r>
-              <a:rPr dirty="0" err="1"/>
-              <a:t>dla</a:t>
-            </a:r>
-            <a:r>
-              <a:rPr dirty="0"/>
-              <a:t> </a:t>
-            </a:r>
-            <a:r>
-              <a:rPr dirty="0" err="1"/>
-              <a:t>Recepcji</a:t>
-            </a:r>
-            <a:r>
-              <a:rPr dirty="0"/>
-              <a:t> w </a:t>
-            </a:r>
-            <a:r>
-              <a:rPr dirty="0" err="1"/>
-              <a:t>architekturze</a:t>
-            </a:r>
-            <a:r>
-              <a:rPr dirty="0"/>
-              <a:t> </a:t>
-            </a:r>
-            <a:r>
-              <a:rPr dirty="0" err="1"/>
-              <a:t>chmurowej</a:t>
-            </a:r>
-            <a:r>
-              <a:rPr dirty="0"/>
-              <a:t>.</a:t>
+              <a:rPr lang="pl-PL" noProof="0" dirty="0"/>
+              <a:t>Przejrzysty i szybki panel zarządzania dla Recepcji w architekturze chmurowej.</a:t>
             </a:r>
           </a:p>
           <a:p>
             <a:pPr lvl="1"/>
             <a:r>
-              <a:rPr dirty="0" err="1"/>
-              <a:t>Automatyczna</a:t>
-            </a:r>
-            <a:r>
-              <a:rPr dirty="0"/>
-              <a:t> </a:t>
-            </a:r>
-            <a:r>
-              <a:rPr dirty="0" err="1"/>
-              <a:t>integracja</a:t>
-            </a:r>
-            <a:r>
-              <a:rPr dirty="0"/>
-              <a:t> z </a:t>
-            </a:r>
-            <a:r>
-              <a:rPr dirty="0" err="1"/>
-              <a:t>bramkami</a:t>
-            </a:r>
-            <a:r>
-              <a:rPr dirty="0"/>
-              <a:t> </a:t>
-            </a:r>
-            <a:r>
-              <a:rPr dirty="0" err="1"/>
-              <a:t>płatności</a:t>
-            </a:r>
-            <a:r>
-              <a:rPr dirty="0"/>
-              <a:t> </a:t>
-            </a:r>
-            <a:r>
-              <a:rPr dirty="0" err="1"/>
-              <a:t>i</a:t>
-            </a:r>
-            <a:r>
-              <a:rPr dirty="0"/>
-              <a:t> </a:t>
-            </a:r>
-            <a:r>
-              <a:rPr dirty="0" err="1"/>
-              <a:t>sprzętowym</a:t>
-            </a:r>
-            <a:r>
-              <a:rPr dirty="0"/>
-              <a:t> </a:t>
-            </a:r>
-            <a:r>
-              <a:rPr dirty="0" err="1"/>
-              <a:t>koderem</a:t>
-            </a:r>
-            <a:r>
-              <a:rPr dirty="0"/>
-              <a:t> kart.</a:t>
+              <a:rPr lang="pl-PL" noProof="0" dirty="0"/>
+              <a:t>Automatyczna integracja z bramkami płatności i sprzętowym koderem kart.</a:t>
             </a:r>
           </a:p>
           <a:p>
             <a:pPr lvl="1"/>
             <a:r>
-              <a:rPr dirty="0" err="1"/>
-              <a:t>Centralna</a:t>
-            </a:r>
-            <a:r>
-              <a:rPr dirty="0"/>
-              <a:t> </a:t>
-            </a:r>
-            <a:r>
-              <a:rPr dirty="0" err="1"/>
-              <a:t>baza</a:t>
-            </a:r>
-            <a:r>
-              <a:rPr dirty="0"/>
-              <a:t> </a:t>
-            </a:r>
-            <a:r>
-              <a:rPr dirty="0" err="1"/>
-              <a:t>danych</a:t>
-            </a:r>
-            <a:r>
-              <a:rPr dirty="0"/>
-              <a:t> </a:t>
-            </a:r>
-            <a:r>
-              <a:rPr dirty="0" err="1"/>
-              <a:t>łącząca</a:t>
-            </a:r>
-            <a:r>
-              <a:rPr dirty="0"/>
-              <a:t> </a:t>
-            </a:r>
-            <a:r>
-              <a:rPr dirty="0" err="1"/>
-              <a:t>wszystkie</a:t>
-            </a:r>
-            <a:r>
-              <a:rPr dirty="0"/>
-              <a:t> </a:t>
-            </a:r>
-            <a:r>
-              <a:rPr dirty="0" err="1"/>
-              <a:t>kanały</a:t>
-            </a:r>
-            <a:r>
-              <a:rPr dirty="0"/>
-              <a:t> </a:t>
-            </a:r>
-            <a:r>
-              <a:rPr dirty="0" err="1"/>
-              <a:t>sprzedaży</a:t>
-            </a:r>
-            <a:r>
-              <a:rPr dirty="0"/>
-              <a:t>.</a:t>
-            </a:r>
-          </a:p>
-        </p:txBody>
-      </p:sp>
+              <a:rPr lang="pl-PL" noProof="0" dirty="0"/>
+              <a:t>Centralna baza danych łącząca wszystkie kanały sprzedaży.</a:t>
+            </a:r>
+          </a:p>
+        </p:txBody>
+      </p:sp>
+      <p:pic>
+        <p:nvPicPr>
+          <p:cNvPr id="7" name="Picture 4" descr="Kalkulator, pióro, kompas, pieniądze i papier z drukowanymi wykresami">
+            <a:extLst>
+              <a:ext uri="{FF2B5EF4-FFF2-40B4-BE49-F238E27FC236}">
+                <a16:creationId xmlns:a16="http://schemas.microsoft.com/office/drawing/2014/main" id="{AEF533AD-70E0-D678-ECAA-11DF0E893471}"/>
+              </a:ext>
+            </a:extLst>
+          </p:cNvPr>
+          <p:cNvPicPr>
+            <a:picLocks noGrp="1" noRot="1" noChangeAspect="1" noMove="1" noResize="1" noEditPoints="1" noAdjustHandles="1" noChangeArrowheads="1" noChangeShapeType="1" noCrop="1"/>
+          </p:cNvPicPr>
+          <p:nvPr/>
+        </p:nvPicPr>
+        <p:blipFill>
+          <a:blip r:embed="rId3">
+            <a:alphaModFix amt="0"/>
+          </a:blip>
+          <a:srcRect l="25303" r="21080" b="-2"/>
+          <a:stretch>
+            <a:fillRect/>
+          </a:stretch>
+        </p:blipFill>
+        <p:spPr>
+          <a:xfrm>
+            <a:off x="12243681" y="4293"/>
+            <a:ext cx="6102825" cy="6858000"/>
+          </a:xfrm>
+          <a:prstGeom prst="rect">
+            <a:avLst/>
+          </a:prstGeom>
+        </p:spPr>
+      </p:pic>
     </p:spTree>
   </p:cSld>
   <p:clrMapOvr>
     <a:masterClrMapping/>
   </p:clrMapOvr>
+  <mc:AlternateContent xmlns:mc="http://schemas.openxmlformats.org/markup-compatibility/2006">
+    <mc:Choice xmlns:p159="http://schemas.microsoft.com/office/powerpoint/2015/09/main" Requires="p159">
+      <p:transition spd="slow">
+        <p159:morph option="byObject"/>
+      </p:transition>
+    </mc:Choice>
+    <mc:Fallback>
+      <p:transition spd="slow">
+        <p:fade/>
+      </p:transition>
+    </mc:Fallback>
+  </mc:AlternateContent>
 </p:sld>
 </file>
 
 <file path=ppt/slides/slide4.xml><?xml version="1.0" encoding="utf-8"?>
 <p:sld xmlns:a="http://schemas.openxmlformats.org/drawingml/2006/main" xmlns:r="http://schemas.openxmlformats.org/officeDocument/2006/relationships" xmlns:p="http://schemas.openxmlformats.org/presentationml/2006/main">
   <p:cSld>
+    <p:bg>
+      <p:bgPr>
+        <a:solidFill>
+          <a:schemeClr val="bg1"/>
+        </a:solidFill>
+        <a:effectLst/>
+      </p:bgPr>
+    </p:bg>
     <p:spTree>
       <p:nvGrpSpPr>
         <p:cNvPr id="1" name=""/>
@@ -5475,6 +5032,227 @@
           <a:chExt cx="0" cy="0"/>
         </a:xfrm>
       </p:grpSpPr>
+      <p:sp useBgFill="1">
+        <p:nvSpPr>
+          <p:cNvPr id="9" name="Slide Background">
+            <a:extLst>
+              <a:ext uri="{FF2B5EF4-FFF2-40B4-BE49-F238E27FC236}">
+                <a16:creationId xmlns:a16="http://schemas.microsoft.com/office/drawing/2014/main" id="{C0763A76-9F1C-4FC5-82B7-DD475DA461B2}"/>
+              </a:ext>
+              <a:ext uri="{C183D7F6-B498-43B3-948B-1728B52AA6E4}">
+                <adec:decorative xmlns:adec="http://schemas.microsoft.com/office/drawing/2017/decorative" val="1"/>
+              </a:ext>
+            </a:extLst>
+          </p:cNvPr>
+          <p:cNvSpPr>
+            <a:spLocks noGrp="1" noRot="1" noChangeAspect="1" noMove="1" noResize="1" noEditPoints="1" noAdjustHandles="1" noChangeArrowheads="1" noChangeShapeType="1" noTextEdit="1"/>
+          </p:cNvSpPr>
+          <p:nvPr>
+            <p:extLst>
+              <p:ext uri="{386F3935-93C4-4BCD-93E2-E3B085C9AB24}">
+                <p16:designElem xmlns:p16="http://schemas.microsoft.com/office/powerpoint/2015/main" val="1"/>
+              </p:ext>
+            </p:extLst>
+          </p:nvPr>
+        </p:nvSpPr>
+        <p:spPr bwMode="white">
+          <a:xfrm>
+            <a:off x="-1" y="0"/>
+            <a:ext cx="12191999" cy="6858000"/>
+          </a:xfrm>
+          <a:prstGeom prst="rect">
+            <a:avLst/>
+          </a:prstGeom>
+          <a:ln>
+            <a:noFill/>
+          </a:ln>
+        </p:spPr>
+        <p:style>
+          <a:lnRef idx="2">
+            <a:schemeClr val="accent1">
+              <a:shade val="50000"/>
+            </a:schemeClr>
+          </a:lnRef>
+          <a:fillRef idx="1">
+            <a:schemeClr val="accent1"/>
+          </a:fillRef>
+          <a:effectRef idx="0">
+            <a:schemeClr val="accent1"/>
+          </a:effectRef>
+          <a:fontRef idx="minor">
+            <a:schemeClr val="lt1"/>
+          </a:fontRef>
+        </p:style>
+        <p:txBody>
+          <a:bodyPr rtlCol="0" anchor="ctr"/>
+          <a:lstStyle>
+            <a:defPPr>
+              <a:defRPr lang="en-US"/>
+            </a:defPPr>
+            <a:lvl1pPr marL="0" algn="l" defTabSz="914400" rtl="0" eaLnBrk="1" latinLnBrk="0" hangingPunct="1">
+              <a:defRPr sz="1800" kern="1200">
+                <a:solidFill>
+                  <a:schemeClr val="lt1"/>
+                </a:solidFill>
+                <a:latin typeface="+mn-lt"/>
+                <a:ea typeface="+mn-ea"/>
+                <a:cs typeface="+mn-cs"/>
+              </a:defRPr>
+            </a:lvl1pPr>
+            <a:lvl2pPr marL="457200" algn="l" defTabSz="914400" rtl="0" eaLnBrk="1" latinLnBrk="0" hangingPunct="1">
+              <a:defRPr sz="1800" kern="1200">
+                <a:solidFill>
+                  <a:schemeClr val="lt1"/>
+                </a:solidFill>
+                <a:latin typeface="+mn-lt"/>
+                <a:ea typeface="+mn-ea"/>
+                <a:cs typeface="+mn-cs"/>
+              </a:defRPr>
+            </a:lvl2pPr>
+            <a:lvl3pPr marL="914400" algn="l" defTabSz="914400" rtl="0" eaLnBrk="1" latinLnBrk="0" hangingPunct="1">
+              <a:defRPr sz="1800" kern="1200">
+                <a:solidFill>
+                  <a:schemeClr val="lt1"/>
+                </a:solidFill>
+                <a:latin typeface="+mn-lt"/>
+                <a:ea typeface="+mn-ea"/>
+                <a:cs typeface="+mn-cs"/>
+              </a:defRPr>
+            </a:lvl3pPr>
+            <a:lvl4pPr marL="1371600" algn="l" defTabSz="914400" rtl="0" eaLnBrk="1" latinLnBrk="0" hangingPunct="1">
+              <a:defRPr sz="1800" kern="1200">
+                <a:solidFill>
+                  <a:schemeClr val="lt1"/>
+                </a:solidFill>
+                <a:latin typeface="+mn-lt"/>
+                <a:ea typeface="+mn-ea"/>
+                <a:cs typeface="+mn-cs"/>
+              </a:defRPr>
+            </a:lvl4pPr>
+            <a:lvl5pPr marL="1828800" algn="l" defTabSz="914400" rtl="0" eaLnBrk="1" latinLnBrk="0" hangingPunct="1">
+              <a:defRPr sz="1800" kern="1200">
+                <a:solidFill>
+                  <a:schemeClr val="lt1"/>
+                </a:solidFill>
+                <a:latin typeface="+mn-lt"/>
+                <a:ea typeface="+mn-ea"/>
+                <a:cs typeface="+mn-cs"/>
+              </a:defRPr>
+            </a:lvl5pPr>
+            <a:lvl6pPr marL="2286000" algn="l" defTabSz="914400" rtl="0" eaLnBrk="1" latinLnBrk="0" hangingPunct="1">
+              <a:defRPr sz="1800" kern="1200">
+                <a:solidFill>
+                  <a:schemeClr val="lt1"/>
+                </a:solidFill>
+                <a:latin typeface="+mn-lt"/>
+                <a:ea typeface="+mn-ea"/>
+                <a:cs typeface="+mn-cs"/>
+              </a:defRPr>
+            </a:lvl6pPr>
+            <a:lvl7pPr marL="2743200" algn="l" defTabSz="914400" rtl="0" eaLnBrk="1" latinLnBrk="0" hangingPunct="1">
+              <a:defRPr sz="1800" kern="1200">
+                <a:solidFill>
+                  <a:schemeClr val="lt1"/>
+                </a:solidFill>
+                <a:latin typeface="+mn-lt"/>
+                <a:ea typeface="+mn-ea"/>
+                <a:cs typeface="+mn-cs"/>
+              </a:defRPr>
+            </a:lvl7pPr>
+            <a:lvl8pPr marL="3200400" algn="l" defTabSz="914400" rtl="0" eaLnBrk="1" latinLnBrk="0" hangingPunct="1">
+              <a:defRPr sz="1800" kern="1200">
+                <a:solidFill>
+                  <a:schemeClr val="lt1"/>
+                </a:solidFill>
+                <a:latin typeface="+mn-lt"/>
+                <a:ea typeface="+mn-ea"/>
+                <a:cs typeface="+mn-cs"/>
+              </a:defRPr>
+            </a:lvl8pPr>
+            <a:lvl9pPr marL="3657600" algn="l" defTabSz="914400" rtl="0" eaLnBrk="1" latinLnBrk="0" hangingPunct="1">
+              <a:defRPr sz="1800" kern="1200">
+                <a:solidFill>
+                  <a:schemeClr val="lt1"/>
+                </a:solidFill>
+                <a:latin typeface="+mn-lt"/>
+                <a:ea typeface="+mn-ea"/>
+                <a:cs typeface="+mn-cs"/>
+              </a:defRPr>
+            </a:lvl9pPr>
+          </a:lstStyle>
+          <a:p>
+            <a:pPr algn="ctr"/>
+            <a:endParaRPr lang="en-US"/>
+          </a:p>
+        </p:txBody>
+      </p:sp>
+      <p:sp useBgFill="1">
+        <p:nvSpPr>
+          <p:cNvPr id="11" name="Rectangle 10">
+            <a:extLst>
+              <a:ext uri="{FF2B5EF4-FFF2-40B4-BE49-F238E27FC236}">
+                <a16:creationId xmlns:a16="http://schemas.microsoft.com/office/drawing/2014/main" id="{E81BF4F6-F2CF-4984-9D14-D6966D92F99F}"/>
+              </a:ext>
+              <a:ext uri="{C183D7F6-B498-43B3-948B-1728B52AA6E4}">
+                <adec:decorative xmlns:adec="http://schemas.microsoft.com/office/drawing/2017/decorative" val="1"/>
+              </a:ext>
+            </a:extLst>
+          </p:cNvPr>
+          <p:cNvSpPr>
+            <a:spLocks noGrp="1" noRot="1" noChangeAspect="1" noMove="1" noResize="1" noEditPoints="1" noAdjustHandles="1" noChangeArrowheads="1" noChangeShapeType="1" noTextEdit="1"/>
+          </p:cNvSpPr>
+          <p:nvPr>
+            <p:extLst>
+              <p:ext uri="{386F3935-93C4-4BCD-93E2-E3B085C9AB24}">
+                <p16:designElem xmlns:p16="http://schemas.microsoft.com/office/powerpoint/2015/main" val="1"/>
+              </p:ext>
+            </p:extLst>
+          </p:nvPr>
+        </p:nvSpPr>
+        <p:spPr>
+          <a:xfrm>
+            <a:off x="1" y="0"/>
+            <a:ext cx="8522446" cy="2285999"/>
+          </a:xfrm>
+          <a:prstGeom prst="rect">
+            <a:avLst/>
+          </a:prstGeom>
+          <a:ln>
+            <a:noFill/>
+          </a:ln>
+          <a:effectLst>
+            <a:outerShdw blurRad="596900" dist="304800" dir="7140000" sx="90000" sy="90000" algn="t" rotWithShape="0">
+              <a:srgbClr val="000000">
+                <a:alpha val="15000"/>
+              </a:srgbClr>
+            </a:outerShdw>
+          </a:effectLst>
+        </p:spPr>
+        <p:style>
+          <a:lnRef idx="2">
+            <a:schemeClr val="accent1">
+              <a:shade val="50000"/>
+            </a:schemeClr>
+          </a:lnRef>
+          <a:fillRef idx="1">
+            <a:schemeClr val="accent1"/>
+          </a:fillRef>
+          <a:effectRef idx="0">
+            <a:schemeClr val="accent1"/>
+          </a:effectRef>
+          <a:fontRef idx="minor">
+            <a:schemeClr val="lt1"/>
+          </a:fontRef>
+        </p:style>
+        <p:txBody>
+          <a:bodyPr rtlCol="0" anchor="ctr"/>
+          <a:lstStyle/>
+          <a:p>
+            <a:pPr algn="ctr"/>
+            <a:endParaRPr lang="en-US"/>
+          </a:p>
+        </p:txBody>
+      </p:sp>
       <p:sp>
         <p:nvSpPr>
           <p:cNvPr id="2" name="Title 1"/>
@@ -5485,42 +5263,22 @@
             <p:ph type="title"/>
           </p:nvPr>
         </p:nvSpPr>
-        <p:spPr/>
-        <p:txBody>
-          <a:bodyPr>
-            <a:normAutofit fontScale="90000"/>
+        <p:spPr>
+          <a:xfrm>
+            <a:off x="761803" y="350196"/>
+            <a:ext cx="4646904" cy="1624520"/>
+          </a:xfrm>
+        </p:spPr>
+        <p:txBody>
+          <a:bodyPr anchor="ctr">
+            <a:normAutofit/>
           </a:bodyPr>
           <a:lstStyle/>
           <a:p>
             <a:r>
-              <a:rPr dirty="0" err="1"/>
-              <a:t>Kluczowe</a:t>
-            </a:r>
-            <a:r>
-              <a:rPr dirty="0"/>
-              <a:t> </a:t>
-            </a:r>
-            <a:r>
-              <a:rPr dirty="0" err="1"/>
-              <a:t>korzyści</a:t>
-            </a:r>
-            <a:r>
-              <a:rPr dirty="0"/>
-              <a:t> - </a:t>
-            </a:r>
-            <a:r>
-              <a:rPr dirty="0" err="1"/>
-              <a:t>Mówimy</a:t>
-            </a:r>
-            <a:r>
-              <a:rPr dirty="0"/>
-              <a:t> w </a:t>
-            </a:r>
-            <a:r>
-              <a:rPr dirty="0" err="1"/>
-              <a:t>liczbach</a:t>
-            </a:r>
-            <a:endParaRPr dirty="0"/>
+              <a:rPr lang="pl-PL" sz="4000" noProof="0"/>
+              <a:t>Kluczowe korzyści - Mówimy w liczbach</a:t>
+            </a:r>
           </a:p>
         </p:txBody>
       </p:sp>
@@ -5534,254 +5292,131 @@
             <p:ph idx="1"/>
           </p:nvPr>
         </p:nvSpPr>
-        <p:spPr/>
-        <p:txBody>
-          <a:bodyPr/>
-          <a:lstStyle/>
-          <a:p>
-            <a:r>
-              <a:rPr dirty="0" err="1"/>
-              <a:t>Zyski</a:t>
-            </a:r>
-            <a:r>
-              <a:rPr dirty="0"/>
-              <a:t> </a:t>
-            </a:r>
-            <a:r>
-              <a:rPr dirty="0" err="1"/>
-              <a:t>dla</a:t>
-            </a:r>
-            <a:r>
-              <a:rPr dirty="0"/>
-              <a:t> </a:t>
-            </a:r>
-            <a:r>
-              <a:rPr dirty="0" err="1"/>
-              <a:t>sieci</a:t>
-            </a:r>
-            <a:r>
-              <a:rPr dirty="0"/>
-              <a:t> X-Hotels:</a:t>
+        <p:spPr>
+          <a:xfrm>
+            <a:off x="761802" y="2743200"/>
+            <a:ext cx="4646905" cy="3613149"/>
+          </a:xfrm>
+        </p:spPr>
+        <p:txBody>
+          <a:bodyPr anchor="ctr">
+            <a:normAutofit/>
+          </a:bodyPr>
+          <a:lstStyle/>
+          <a:p>
+            <a:r>
+              <a:rPr lang="pl-PL" sz="2000" noProof="0"/>
+              <a:t>Zyski dla sieci </a:t>
+            </a:r>
+            <a:r>
+              <a:rPr lang="en-US" sz="2000" noProof="0"/>
+              <a:t>X-Hotels</a:t>
+            </a:r>
+            <a:r>
+              <a:rPr lang="pl-PL" sz="2000" noProof="0"/>
+              <a:t>:</a:t>
             </a:r>
           </a:p>
           <a:p>
             <a:pPr lvl="1"/>
             <a:r>
-              <a:rPr dirty="0" err="1"/>
-              <a:t>Dostępność</a:t>
-            </a:r>
-            <a:r>
-              <a:rPr dirty="0"/>
-              <a:t> </a:t>
-            </a:r>
-            <a:r>
-              <a:rPr dirty="0" err="1"/>
-              <a:t>na</a:t>
-            </a:r>
-            <a:r>
-              <a:rPr dirty="0"/>
-              <a:t> </a:t>
-            </a:r>
-            <a:r>
-              <a:rPr dirty="0" err="1"/>
-              <a:t>poziomie</a:t>
-            </a:r>
-            <a:r>
-              <a:rPr dirty="0"/>
-              <a:t> </a:t>
-            </a:r>
-            <a:r>
-              <a:rPr dirty="0" err="1"/>
-              <a:t>trzech</a:t>
-            </a:r>
-            <a:r>
-              <a:rPr dirty="0"/>
-              <a:t> </a:t>
-            </a:r>
-            <a:r>
-              <a:rPr dirty="0" err="1"/>
-              <a:t>dziewiątek</a:t>
-            </a:r>
-            <a:r>
-              <a:rPr dirty="0"/>
-              <a:t> (SLA 99,9%).</a:t>
+              <a:rPr lang="pl-PL" sz="2000" noProof="0"/>
+              <a:t>Dostępność na poziomie trzech dziewiątek (SLA 99,9%).</a:t>
             </a:r>
           </a:p>
           <a:p>
             <a:pPr lvl="1"/>
             <a:r>
-              <a:rPr dirty="0" err="1"/>
-              <a:t>Czas</a:t>
-            </a:r>
-            <a:r>
-              <a:rPr dirty="0"/>
-              <a:t> </a:t>
-            </a:r>
-            <a:r>
-              <a:rPr dirty="0" err="1"/>
-              <a:t>wyszukiwania</a:t>
-            </a:r>
-            <a:r>
-              <a:rPr dirty="0"/>
-              <a:t> </a:t>
-            </a:r>
-            <a:r>
-              <a:rPr dirty="0" err="1"/>
-              <a:t>ofert</a:t>
-            </a:r>
-            <a:r>
-              <a:rPr dirty="0"/>
-              <a:t> </a:t>
-            </a:r>
-            <a:r>
-              <a:rPr dirty="0" err="1"/>
-              <a:t>i</a:t>
-            </a:r>
-            <a:r>
-              <a:rPr dirty="0"/>
-              <a:t> </a:t>
-            </a:r>
-            <a:r>
-              <a:rPr dirty="0" err="1"/>
-              <a:t>weryfikacji</a:t>
-            </a:r>
-            <a:r>
-              <a:rPr dirty="0"/>
-              <a:t> </a:t>
-            </a:r>
-            <a:r>
-              <a:rPr dirty="0" err="1"/>
-              <a:t>poniżej</a:t>
-            </a:r>
-            <a:r>
-              <a:rPr dirty="0"/>
-              <a:t> 3 </a:t>
-            </a:r>
-            <a:r>
-              <a:rPr dirty="0" err="1"/>
-              <a:t>sekund</a:t>
-            </a:r>
-            <a:r>
-              <a:rPr dirty="0"/>
-              <a:t>.</a:t>
+              <a:rPr lang="pl-PL" sz="2000" noProof="0"/>
+              <a:t>Czas wyszukiwania ofert i weryfikacji poniżej 3 sekund.</a:t>
             </a:r>
           </a:p>
           <a:p>
             <a:pPr lvl="1"/>
             <a:r>
-              <a:rPr dirty="0" err="1"/>
-              <a:t>Całkowita</a:t>
-            </a:r>
-            <a:r>
-              <a:rPr dirty="0"/>
-              <a:t> </a:t>
-            </a:r>
-            <a:r>
-              <a:rPr dirty="0" err="1"/>
-              <a:t>eliminacja</a:t>
-            </a:r>
-            <a:r>
-              <a:rPr dirty="0"/>
-              <a:t> </a:t>
-            </a:r>
-            <a:r>
-              <a:rPr dirty="0" err="1"/>
-              <a:t>podwójnych</a:t>
-            </a:r>
-            <a:r>
-              <a:rPr dirty="0"/>
-              <a:t> </a:t>
-            </a:r>
-            <a:r>
-              <a:rPr dirty="0" err="1"/>
-              <a:t>rezerwacji</a:t>
-            </a:r>
-            <a:r>
-              <a:rPr lang="en-US" dirty="0"/>
-              <a:t>.</a:t>
-            </a:r>
-            <a:endParaRPr dirty="0"/>
+              <a:rPr lang="pl-PL" sz="2000" noProof="0"/>
+              <a:t>Całkowita eliminacja podwójnych rezerwacji.</a:t>
+            </a:r>
           </a:p>
           <a:p>
             <a:pPr lvl="1"/>
             <a:r>
-              <a:rPr dirty="0" err="1"/>
-              <a:t>Szybszy</a:t>
-            </a:r>
-            <a:r>
-              <a:rPr dirty="0"/>
-              <a:t> </a:t>
-            </a:r>
-            <a:r>
-              <a:rPr dirty="0" err="1"/>
-              <a:t>obrót</a:t>
-            </a:r>
-            <a:r>
-              <a:rPr dirty="0"/>
-              <a:t> </a:t>
-            </a:r>
-            <a:r>
-              <a:rPr dirty="0" err="1"/>
-              <a:t>i</a:t>
-            </a:r>
-            <a:r>
-              <a:rPr dirty="0"/>
-              <a:t> </a:t>
-            </a:r>
-            <a:r>
-              <a:rPr dirty="0" err="1"/>
-              <a:t>mniejsze</a:t>
-            </a:r>
-            <a:r>
-              <a:rPr dirty="0"/>
-              <a:t> </a:t>
-            </a:r>
-            <a:r>
-              <a:rPr dirty="0" err="1"/>
-              <a:t>kolejki</a:t>
-            </a:r>
-            <a:r>
-              <a:rPr dirty="0"/>
-              <a:t> - </a:t>
-            </a:r>
-            <a:r>
-              <a:rPr dirty="0" err="1"/>
-              <a:t>proces</a:t>
-            </a:r>
-            <a:r>
-              <a:rPr dirty="0"/>
-              <a:t> check-in bez </a:t>
-            </a:r>
-            <a:r>
-              <a:rPr dirty="0" err="1"/>
-              <a:t>zbędnej</a:t>
-            </a:r>
-            <a:r>
-              <a:rPr dirty="0"/>
-              <a:t> </a:t>
-            </a:r>
-            <a:r>
-              <a:rPr dirty="0" err="1"/>
-              <a:t>papierologii</a:t>
-            </a:r>
-            <a:r>
-              <a:rPr dirty="0"/>
-              <a:t>.</a:t>
-            </a:r>
-          </a:p>
-        </p:txBody>
-      </p:sp>
+              <a:rPr lang="pl-PL" sz="2000" noProof="0"/>
+              <a:t>Szybszy obrót i mniejsze kolejki - proces </a:t>
+            </a:r>
+            <a:r>
+              <a:rPr lang="en-US" sz="2000" noProof="0"/>
+              <a:t>check-in</a:t>
+            </a:r>
+            <a:r>
+              <a:rPr lang="pl-PL" sz="2000" noProof="0"/>
+              <a:t> bez zbędnej papierologii.</a:t>
+            </a:r>
+          </a:p>
+        </p:txBody>
+      </p:sp>
+      <p:pic>
+        <p:nvPicPr>
+          <p:cNvPr id="5" name="Picture 4" descr="Kalkulator, pióro, kompas, pieniądze i papier z drukowanymi wykresami">
+            <a:extLst>
+              <a:ext uri="{FF2B5EF4-FFF2-40B4-BE49-F238E27FC236}">
+                <a16:creationId xmlns:a16="http://schemas.microsoft.com/office/drawing/2014/main" id="{1D46BAAF-EE81-0D14-E2BF-769A7229DD36}"/>
+              </a:ext>
+            </a:extLst>
+          </p:cNvPr>
+          <p:cNvPicPr>
+            <a:picLocks noChangeAspect="1"/>
+          </p:cNvPicPr>
+          <p:nvPr/>
+        </p:nvPicPr>
+        <p:blipFill>
+          <a:blip r:embed="rId3"/>
+          <a:srcRect l="25303" r="21080" b="-2"/>
+          <a:stretch>
+            <a:fillRect/>
+          </a:stretch>
+        </p:blipFill>
+        <p:spPr>
+          <a:xfrm>
+            <a:off x="6096000" y="1"/>
+            <a:ext cx="6102825" cy="6858000"/>
+          </a:xfrm>
+          <a:prstGeom prst="rect">
+            <a:avLst/>
+          </a:prstGeom>
+        </p:spPr>
+      </p:pic>
     </p:spTree>
   </p:cSld>
   <p:clrMapOvr>
     <a:masterClrMapping/>
   </p:clrMapOvr>
+  <mc:AlternateContent xmlns:mc="http://schemas.openxmlformats.org/markup-compatibility/2006">
+    <mc:Choice xmlns:p159="http://schemas.microsoft.com/office/powerpoint/2015/09/main" Requires="p159">
+      <p:transition spd="slow">
+        <p159:morph option="byObject"/>
+      </p:transition>
+    </mc:Choice>
+    <mc:Fallback>
+      <p:transition spd="slow">
+        <p:fade/>
+      </p:transition>
+    </mc:Fallback>
+  </mc:AlternateContent>
 </p:sld>
 </file>
 
 <file path=ppt/slides/slide5.xml><?xml version="1.0" encoding="utf-8"?>
 <p:sld xmlns:a="http://schemas.openxmlformats.org/drawingml/2006/main" xmlns:r="http://schemas.openxmlformats.org/officeDocument/2006/relationships" xmlns:p="http://schemas.openxmlformats.org/presentationml/2006/main">
   <p:cSld>
+    <p:bg>
+      <p:bgPr>
+        <a:solidFill>
+          <a:schemeClr val="bg1"/>
+        </a:solidFill>
+        <a:effectLst/>
+      </p:bgPr>
+    </p:bg>
     <p:spTree>
       <p:nvGrpSpPr>
         <p:cNvPr id="1" name=""/>
@@ -5796,6 +5431,66 @@
           <a:chExt cx="0" cy="0"/>
         </a:xfrm>
       </p:grpSpPr>
+      <p:sp useBgFill="1">
+        <p:nvSpPr>
+          <p:cNvPr id="8" name="Rectangle 7">
+            <a:extLst>
+              <a:ext uri="{FF2B5EF4-FFF2-40B4-BE49-F238E27FC236}">
+                <a16:creationId xmlns:a16="http://schemas.microsoft.com/office/drawing/2014/main" id="{100EDD19-6802-4EC3-95CE-CFFAB042CFD6}"/>
+              </a:ext>
+              <a:ext uri="{C183D7F6-B498-43B3-948B-1728B52AA6E4}">
+                <adec:decorative xmlns:adec="http://schemas.microsoft.com/office/drawing/2017/decorative" val="1"/>
+              </a:ext>
+            </a:extLst>
+          </p:cNvPr>
+          <p:cNvSpPr>
+            <a:spLocks noGrp="1" noRot="1" noChangeAspect="1" noMove="1" noResize="1" noEditPoints="1" noAdjustHandles="1" noChangeArrowheads="1" noChangeShapeType="1" noTextEdit="1"/>
+          </p:cNvSpPr>
+          <p:nvPr>
+            <p:extLst>
+              <p:ext uri="{386F3935-93C4-4BCD-93E2-E3B085C9AB24}">
+                <p16:designElem xmlns:p16="http://schemas.microsoft.com/office/powerpoint/2015/main" val="1"/>
+              </p:ext>
+            </p:extLst>
+          </p:nvPr>
+        </p:nvSpPr>
+        <p:spPr>
+          <a:xfrm>
+            <a:off x="0" y="0"/>
+            <a:ext cx="12188952" cy="6858000"/>
+          </a:xfrm>
+          <a:prstGeom prst="rect">
+            <a:avLst/>
+          </a:prstGeom>
+          <a:ln>
+            <a:noFill/>
+          </a:ln>
+        </p:spPr>
+        <p:style>
+          <a:lnRef idx="2">
+            <a:schemeClr val="accent1">
+              <a:shade val="50000"/>
+            </a:schemeClr>
+          </a:lnRef>
+          <a:fillRef idx="1">
+            <a:schemeClr val="accent1"/>
+          </a:fillRef>
+          <a:effectRef idx="0">
+            <a:schemeClr val="accent1"/>
+          </a:effectRef>
+          <a:fontRef idx="minor">
+            <a:schemeClr val="lt1"/>
+          </a:fontRef>
+        </p:style>
+        <p:txBody>
+          <a:bodyPr rtlCol="0" anchor="ctr"/>
+          <a:lstStyle/>
+          <a:p>
+            <a:pPr algn="ctr"/>
+            <a:endParaRPr lang="en-US"/>
+          </a:p>
+        </p:txBody>
+      </p:sp>
       <p:sp>
         <p:nvSpPr>
           <p:cNvPr id="2" name="Title 1"/>
@@ -5806,40 +5501,660 @@
             <p:ph type="title"/>
           </p:nvPr>
         </p:nvSpPr>
-        <p:spPr/>
-        <p:txBody>
-          <a:bodyPr/>
-          <a:lstStyle/>
-          <a:p>
-            <a:r>
-              <a:rPr dirty="0" err="1"/>
-              <a:t>Wizja</a:t>
-            </a:r>
-            <a:r>
-              <a:rPr dirty="0"/>
-              <a:t> </a:t>
-            </a:r>
-            <a:r>
-              <a:rPr dirty="0" err="1"/>
-              <a:t>Sukcesu</a:t>
-            </a:r>
-            <a:r>
-              <a:rPr dirty="0"/>
-              <a:t>: </a:t>
-            </a:r>
-            <a:r>
-              <a:rPr dirty="0" err="1"/>
-              <a:t>Oczami</a:t>
-            </a:r>
-            <a:r>
-              <a:rPr dirty="0"/>
-              <a:t> </a:t>
-            </a:r>
-            <a:r>
-              <a:rPr dirty="0" err="1"/>
-              <a:t>Gościa</a:t>
-            </a:r>
-            <a:endParaRPr dirty="0"/>
+        <p:spPr>
+          <a:xfrm>
+            <a:off x="838200" y="365125"/>
+            <a:ext cx="10515600" cy="1325563"/>
+          </a:xfrm>
+        </p:spPr>
+        <p:txBody>
+          <a:bodyPr>
+            <a:normAutofit/>
+          </a:bodyPr>
+          <a:lstStyle/>
+          <a:p>
+            <a:r>
+              <a:rPr lang="pl-PL" sz="5400" noProof="0"/>
+              <a:t>Wizja Sukcesu: Oczami Gościa</a:t>
+            </a:r>
+          </a:p>
+        </p:txBody>
+      </p:sp>
+      <p:sp>
+        <p:nvSpPr>
+          <p:cNvPr id="10" name="sketch line">
+            <a:extLst>
+              <a:ext uri="{FF2B5EF4-FFF2-40B4-BE49-F238E27FC236}">
+                <a16:creationId xmlns:a16="http://schemas.microsoft.com/office/drawing/2014/main" id="{DB17E863-922E-4C26-BD64-E8FD41D28661}"/>
+              </a:ext>
+              <a:ext uri="{C183D7F6-B498-43B3-948B-1728B52AA6E4}">
+                <adec:decorative xmlns:adec="http://schemas.microsoft.com/office/drawing/2017/decorative" val="1"/>
+              </a:ext>
+            </a:extLst>
+          </p:cNvPr>
+          <p:cNvSpPr>
+            <a:spLocks noGrp="1" noRot="1" noChangeAspect="1" noMove="1" noResize="1" noEditPoints="1" noAdjustHandles="1" noChangeArrowheads="1" noChangeShapeType="1" noTextEdit="1"/>
+          </p:cNvSpPr>
+          <p:nvPr>
+            <p:extLst>
+              <p:ext uri="{386F3935-93C4-4BCD-93E2-E3B085C9AB24}">
+                <p16:designElem xmlns:p16="http://schemas.microsoft.com/office/powerpoint/2015/main" val="1"/>
+              </p:ext>
+            </p:extLst>
+          </p:nvPr>
+        </p:nvSpPr>
+        <p:spPr>
+          <a:xfrm>
+            <a:off x="669036" y="1677373"/>
+            <a:ext cx="10853928" cy="18288"/>
+          </a:xfrm>
+          <a:custGeom>
+            <a:avLst/>
+            <a:gdLst>
+              <a:gd name="csX0" fmla="*/ 0 w 10853928"/>
+              <a:gd name="csY0" fmla="*/ 0 h 18288"/>
+              <a:gd name="csX1" fmla="*/ 461292 w 10853928"/>
+              <a:gd name="csY1" fmla="*/ 0 h 18288"/>
+              <a:gd name="csX2" fmla="*/ 1139662 w 10853928"/>
+              <a:gd name="csY2" fmla="*/ 0 h 18288"/>
+              <a:gd name="csX3" fmla="*/ 1926572 w 10853928"/>
+              <a:gd name="csY3" fmla="*/ 0 h 18288"/>
+              <a:gd name="csX4" fmla="*/ 2279325 w 10853928"/>
+              <a:gd name="csY4" fmla="*/ 0 h 18288"/>
+              <a:gd name="csX5" fmla="*/ 2632078 w 10853928"/>
+              <a:gd name="csY5" fmla="*/ 0 h 18288"/>
+              <a:gd name="csX6" fmla="*/ 3527527 w 10853928"/>
+              <a:gd name="csY6" fmla="*/ 0 h 18288"/>
+              <a:gd name="csX7" fmla="*/ 4205897 w 10853928"/>
+              <a:gd name="csY7" fmla="*/ 0 h 18288"/>
+              <a:gd name="csX8" fmla="*/ 4558650 w 10853928"/>
+              <a:gd name="csY8" fmla="*/ 0 h 18288"/>
+              <a:gd name="csX9" fmla="*/ 5237020 w 10853928"/>
+              <a:gd name="csY9" fmla="*/ 0 h 18288"/>
+              <a:gd name="csX10" fmla="*/ 6132469 w 10853928"/>
+              <a:gd name="csY10" fmla="*/ 0 h 18288"/>
+              <a:gd name="csX11" fmla="*/ 6702301 w 10853928"/>
+              <a:gd name="csY11" fmla="*/ 0 h 18288"/>
+              <a:gd name="csX12" fmla="*/ 7272132 w 10853928"/>
+              <a:gd name="csY12" fmla="*/ 0 h 18288"/>
+              <a:gd name="csX13" fmla="*/ 7950502 w 10853928"/>
+              <a:gd name="csY13" fmla="*/ 0 h 18288"/>
+              <a:gd name="csX14" fmla="*/ 8737412 w 10853928"/>
+              <a:gd name="csY14" fmla="*/ 0 h 18288"/>
+              <a:gd name="csX15" fmla="*/ 9524322 w 10853928"/>
+              <a:gd name="csY15" fmla="*/ 0 h 18288"/>
+              <a:gd name="csX16" fmla="*/ 10853928 w 10853928"/>
+              <a:gd name="csY16" fmla="*/ 0 h 18288"/>
+              <a:gd name="csX17" fmla="*/ 10853928 w 10853928"/>
+              <a:gd name="csY17" fmla="*/ 18288 h 18288"/>
+              <a:gd name="csX18" fmla="*/ 10392636 w 10853928"/>
+              <a:gd name="csY18" fmla="*/ 18288 h 18288"/>
+              <a:gd name="csX19" fmla="*/ 9497187 w 10853928"/>
+              <a:gd name="csY19" fmla="*/ 18288 h 18288"/>
+              <a:gd name="csX20" fmla="*/ 8818817 w 10853928"/>
+              <a:gd name="csY20" fmla="*/ 18288 h 18288"/>
+              <a:gd name="csX21" fmla="*/ 8466064 w 10853928"/>
+              <a:gd name="csY21" fmla="*/ 18288 h 18288"/>
+              <a:gd name="csX22" fmla="*/ 7787693 w 10853928"/>
+              <a:gd name="csY22" fmla="*/ 18288 h 18288"/>
+              <a:gd name="csX23" fmla="*/ 7217862 w 10853928"/>
+              <a:gd name="csY23" fmla="*/ 18288 h 18288"/>
+              <a:gd name="csX24" fmla="*/ 6648031 w 10853928"/>
+              <a:gd name="csY24" fmla="*/ 18288 h 18288"/>
+              <a:gd name="csX25" fmla="*/ 6078200 w 10853928"/>
+              <a:gd name="csY25" fmla="*/ 18288 h 18288"/>
+              <a:gd name="csX26" fmla="*/ 5508368 w 10853928"/>
+              <a:gd name="csY26" fmla="*/ 18288 h 18288"/>
+              <a:gd name="csX27" fmla="*/ 4721459 w 10853928"/>
+              <a:gd name="csY27" fmla="*/ 18288 h 18288"/>
+              <a:gd name="csX28" fmla="*/ 4043088 w 10853928"/>
+              <a:gd name="csY28" fmla="*/ 18288 h 18288"/>
+              <a:gd name="csX29" fmla="*/ 3690336 w 10853928"/>
+              <a:gd name="csY29" fmla="*/ 18288 h 18288"/>
+              <a:gd name="csX30" fmla="*/ 3120504 w 10853928"/>
+              <a:gd name="csY30" fmla="*/ 18288 h 18288"/>
+              <a:gd name="csX31" fmla="*/ 2333595 w 10853928"/>
+              <a:gd name="csY31" fmla="*/ 18288 h 18288"/>
+              <a:gd name="csX32" fmla="*/ 1872303 w 10853928"/>
+              <a:gd name="csY32" fmla="*/ 18288 h 18288"/>
+              <a:gd name="csX33" fmla="*/ 976854 w 10853928"/>
+              <a:gd name="csY33" fmla="*/ 18288 h 18288"/>
+              <a:gd name="csX34" fmla="*/ 0 w 10853928"/>
+              <a:gd name="csY34" fmla="*/ 18288 h 18288"/>
+              <a:gd name="csX35" fmla="*/ 0 w 10853928"/>
+              <a:gd name="csY35" fmla="*/ 0 h 18288"/>
+            </a:gdLst>
+            <a:ahLst/>
+            <a:cxnLst>
+              <a:cxn ang="0">
+                <a:pos x="csX0" y="csY0"/>
+              </a:cxn>
+              <a:cxn ang="0">
+                <a:pos x="csX1" y="csY1"/>
+              </a:cxn>
+              <a:cxn ang="0">
+                <a:pos x="csX2" y="csY2"/>
+              </a:cxn>
+              <a:cxn ang="0">
+                <a:pos x="csX3" y="csY3"/>
+              </a:cxn>
+              <a:cxn ang="0">
+                <a:pos x="csX4" y="csY4"/>
+              </a:cxn>
+              <a:cxn ang="0">
+                <a:pos x="csX5" y="csY5"/>
+              </a:cxn>
+              <a:cxn ang="0">
+                <a:pos x="csX6" y="csY6"/>
+              </a:cxn>
+              <a:cxn ang="0">
+                <a:pos x="csX7" y="csY7"/>
+              </a:cxn>
+              <a:cxn ang="0">
+                <a:pos x="csX8" y="csY8"/>
+              </a:cxn>
+              <a:cxn ang="0">
+                <a:pos x="csX9" y="csY9"/>
+              </a:cxn>
+              <a:cxn ang="0">
+                <a:pos x="csX10" y="csY10"/>
+              </a:cxn>
+              <a:cxn ang="0">
+                <a:pos x="csX11" y="csY11"/>
+              </a:cxn>
+              <a:cxn ang="0">
+                <a:pos x="csX12" y="csY12"/>
+              </a:cxn>
+              <a:cxn ang="0">
+                <a:pos x="csX13" y="csY13"/>
+              </a:cxn>
+              <a:cxn ang="0">
+                <a:pos x="csX14" y="csY14"/>
+              </a:cxn>
+              <a:cxn ang="0">
+                <a:pos x="csX15" y="csY15"/>
+              </a:cxn>
+              <a:cxn ang="0">
+                <a:pos x="csX16" y="csY16"/>
+              </a:cxn>
+              <a:cxn ang="0">
+                <a:pos x="csX17" y="csY17"/>
+              </a:cxn>
+              <a:cxn ang="0">
+                <a:pos x="csX18" y="csY18"/>
+              </a:cxn>
+              <a:cxn ang="0">
+                <a:pos x="csX19" y="csY19"/>
+              </a:cxn>
+              <a:cxn ang="0">
+                <a:pos x="csX20" y="csY20"/>
+              </a:cxn>
+              <a:cxn ang="0">
+                <a:pos x="csX21" y="csY21"/>
+              </a:cxn>
+              <a:cxn ang="0">
+                <a:pos x="csX22" y="csY22"/>
+              </a:cxn>
+              <a:cxn ang="0">
+                <a:pos x="csX23" y="csY23"/>
+              </a:cxn>
+              <a:cxn ang="0">
+                <a:pos x="csX24" y="csY24"/>
+              </a:cxn>
+              <a:cxn ang="0">
+                <a:pos x="csX25" y="csY25"/>
+              </a:cxn>
+              <a:cxn ang="0">
+                <a:pos x="csX26" y="csY26"/>
+              </a:cxn>
+              <a:cxn ang="0">
+                <a:pos x="csX27" y="csY27"/>
+              </a:cxn>
+              <a:cxn ang="0">
+                <a:pos x="csX28" y="csY28"/>
+              </a:cxn>
+              <a:cxn ang="0">
+                <a:pos x="csX29" y="csY29"/>
+              </a:cxn>
+              <a:cxn ang="0">
+                <a:pos x="csX30" y="csY30"/>
+              </a:cxn>
+              <a:cxn ang="0">
+                <a:pos x="csX31" y="csY31"/>
+              </a:cxn>
+              <a:cxn ang="0">
+                <a:pos x="csX32" y="csY32"/>
+              </a:cxn>
+              <a:cxn ang="0">
+                <a:pos x="csX33" y="csY33"/>
+              </a:cxn>
+              <a:cxn ang="0">
+                <a:pos x="csX34" y="csY34"/>
+              </a:cxn>
+              <a:cxn ang="0">
+                <a:pos x="csX35" y="csY35"/>
+              </a:cxn>
+            </a:cxnLst>
+            <a:rect l="l" t="t" r="r" b="b"/>
+            <a:pathLst>
+              <a:path w="10853928" h="18288" fill="none" extrusionOk="0">
+                <a:moveTo>
+                  <a:pt x="0" y="0"/>
+                </a:moveTo>
+                <a:cubicBezTo>
+                  <a:pt x="146993" y="-19076"/>
+                  <a:pt x="347684" y="-4790"/>
+                  <a:pt x="461292" y="0"/>
+                </a:cubicBezTo>
+                <a:cubicBezTo>
+                  <a:pt x="574900" y="4790"/>
+                  <a:pt x="808367" y="19821"/>
+                  <a:pt x="1139662" y="0"/>
+                </a:cubicBezTo>
+                <a:cubicBezTo>
+                  <a:pt x="1470957" y="-19821"/>
+                  <a:pt x="1627405" y="5721"/>
+                  <a:pt x="1926572" y="0"/>
+                </a:cubicBezTo>
+                <a:cubicBezTo>
+                  <a:pt x="2225739" y="-5721"/>
+                  <a:pt x="2137730" y="-3235"/>
+                  <a:pt x="2279325" y="0"/>
+                </a:cubicBezTo>
+                <a:cubicBezTo>
+                  <a:pt x="2420920" y="3235"/>
+                  <a:pt x="2456518" y="9685"/>
+                  <a:pt x="2632078" y="0"/>
+                </a:cubicBezTo>
+                <a:cubicBezTo>
+                  <a:pt x="2807638" y="-9685"/>
+                  <a:pt x="3211516" y="-43007"/>
+                  <a:pt x="3527527" y="0"/>
+                </a:cubicBezTo>
+                <a:cubicBezTo>
+                  <a:pt x="3843538" y="43007"/>
+                  <a:pt x="4058833" y="22042"/>
+                  <a:pt x="4205897" y="0"/>
+                </a:cubicBezTo>
+                <a:cubicBezTo>
+                  <a:pt x="4352961" y="-22042"/>
+                  <a:pt x="4474805" y="-11846"/>
+                  <a:pt x="4558650" y="0"/>
+                </a:cubicBezTo>
+                <a:cubicBezTo>
+                  <a:pt x="4642495" y="11846"/>
+                  <a:pt x="5041928" y="-6069"/>
+                  <a:pt x="5237020" y="0"/>
+                </a:cubicBezTo>
+                <a:cubicBezTo>
+                  <a:pt x="5432112" y="6069"/>
+                  <a:pt x="5943266" y="-17479"/>
+                  <a:pt x="6132469" y="0"/>
+                </a:cubicBezTo>
+                <a:cubicBezTo>
+                  <a:pt x="6321672" y="17479"/>
+                  <a:pt x="6483872" y="26234"/>
+                  <a:pt x="6702301" y="0"/>
+                </a:cubicBezTo>
+                <a:cubicBezTo>
+                  <a:pt x="6920730" y="-26234"/>
+                  <a:pt x="6991194" y="-15156"/>
+                  <a:pt x="7272132" y="0"/>
+                </a:cubicBezTo>
+                <a:cubicBezTo>
+                  <a:pt x="7553070" y="15156"/>
+                  <a:pt x="7684444" y="-32961"/>
+                  <a:pt x="7950502" y="0"/>
+                </a:cubicBezTo>
+                <a:cubicBezTo>
+                  <a:pt x="8216560" y="32961"/>
+                  <a:pt x="8493290" y="-10491"/>
+                  <a:pt x="8737412" y="0"/>
+                </a:cubicBezTo>
+                <a:cubicBezTo>
+                  <a:pt x="8981534" y="10491"/>
+                  <a:pt x="9191586" y="-13899"/>
+                  <a:pt x="9524322" y="0"/>
+                </a:cubicBezTo>
+                <a:cubicBezTo>
+                  <a:pt x="9857058" y="13899"/>
+                  <a:pt x="10297509" y="7485"/>
+                  <a:pt x="10853928" y="0"/>
+                </a:cubicBezTo>
+                <a:cubicBezTo>
+                  <a:pt x="10854574" y="4451"/>
+                  <a:pt x="10854418" y="9226"/>
+                  <a:pt x="10853928" y="18288"/>
+                </a:cubicBezTo>
+                <a:cubicBezTo>
+                  <a:pt x="10691638" y="28522"/>
+                  <a:pt x="10574319" y="29578"/>
+                  <a:pt x="10392636" y="18288"/>
+                </a:cubicBezTo>
+                <a:cubicBezTo>
+                  <a:pt x="10210953" y="6998"/>
+                  <a:pt x="9836277" y="-16742"/>
+                  <a:pt x="9497187" y="18288"/>
+                </a:cubicBezTo>
+                <a:cubicBezTo>
+                  <a:pt x="9158097" y="53318"/>
+                  <a:pt x="9119479" y="30714"/>
+                  <a:pt x="8818817" y="18288"/>
+                </a:cubicBezTo>
+                <a:cubicBezTo>
+                  <a:pt x="8518155" y="5863"/>
+                  <a:pt x="8640037" y="6483"/>
+                  <a:pt x="8466064" y="18288"/>
+                </a:cubicBezTo>
+                <a:cubicBezTo>
+                  <a:pt x="8292091" y="30093"/>
+                  <a:pt x="7997656" y="18914"/>
+                  <a:pt x="7787693" y="18288"/>
+                </a:cubicBezTo>
+                <a:cubicBezTo>
+                  <a:pt x="7577730" y="17662"/>
+                  <a:pt x="7412468" y="21416"/>
+                  <a:pt x="7217862" y="18288"/>
+                </a:cubicBezTo>
+                <a:cubicBezTo>
+                  <a:pt x="7023256" y="15160"/>
+                  <a:pt x="6898018" y="14824"/>
+                  <a:pt x="6648031" y="18288"/>
+                </a:cubicBezTo>
+                <a:cubicBezTo>
+                  <a:pt x="6398044" y="21752"/>
+                  <a:pt x="6254402" y="38625"/>
+                  <a:pt x="6078200" y="18288"/>
+                </a:cubicBezTo>
+                <a:cubicBezTo>
+                  <a:pt x="5901998" y="-2049"/>
+                  <a:pt x="5622886" y="3213"/>
+                  <a:pt x="5508368" y="18288"/>
+                </a:cubicBezTo>
+                <a:cubicBezTo>
+                  <a:pt x="5393850" y="33363"/>
+                  <a:pt x="5036260" y="26830"/>
+                  <a:pt x="4721459" y="18288"/>
+                </a:cubicBezTo>
+                <a:cubicBezTo>
+                  <a:pt x="4406658" y="9746"/>
+                  <a:pt x="4239221" y="41551"/>
+                  <a:pt x="4043088" y="18288"/>
+                </a:cubicBezTo>
+                <a:cubicBezTo>
+                  <a:pt x="3846955" y="-4975"/>
+                  <a:pt x="3818802" y="34658"/>
+                  <a:pt x="3690336" y="18288"/>
+                </a:cubicBezTo>
+                <a:cubicBezTo>
+                  <a:pt x="3561870" y="1918"/>
+                  <a:pt x="3265491" y="42194"/>
+                  <a:pt x="3120504" y="18288"/>
+                </a:cubicBezTo>
+                <a:cubicBezTo>
+                  <a:pt x="2975517" y="-5618"/>
+                  <a:pt x="2720254" y="36673"/>
+                  <a:pt x="2333595" y="18288"/>
+                </a:cubicBezTo>
+                <a:cubicBezTo>
+                  <a:pt x="1946936" y="-97"/>
+                  <a:pt x="2097241" y="5776"/>
+                  <a:pt x="1872303" y="18288"/>
+                </a:cubicBezTo>
+                <a:cubicBezTo>
+                  <a:pt x="1647365" y="30800"/>
+                  <a:pt x="1282708" y="45380"/>
+                  <a:pt x="976854" y="18288"/>
+                </a:cubicBezTo>
+                <a:cubicBezTo>
+                  <a:pt x="671000" y="-8804"/>
+                  <a:pt x="408401" y="-12775"/>
+                  <a:pt x="0" y="18288"/>
+                </a:cubicBezTo>
+                <a:cubicBezTo>
+                  <a:pt x="-213" y="9468"/>
+                  <a:pt x="187" y="4459"/>
+                  <a:pt x="0" y="0"/>
+                </a:cubicBezTo>
+                <a:close/>
+              </a:path>
+              <a:path w="10853928" h="18288" stroke="0" extrusionOk="0">
+                <a:moveTo>
+                  <a:pt x="0" y="0"/>
+                </a:moveTo>
+                <a:cubicBezTo>
+                  <a:pt x="267322" y="15284"/>
+                  <a:pt x="415388" y="-21048"/>
+                  <a:pt x="569831" y="0"/>
+                </a:cubicBezTo>
+                <a:cubicBezTo>
+                  <a:pt x="724274" y="21048"/>
+                  <a:pt x="769333" y="-2353"/>
+                  <a:pt x="922584" y="0"/>
+                </a:cubicBezTo>
+                <a:cubicBezTo>
+                  <a:pt x="1075835" y="2353"/>
+                  <a:pt x="1399490" y="-145"/>
+                  <a:pt x="1818033" y="0"/>
+                </a:cubicBezTo>
+                <a:cubicBezTo>
+                  <a:pt x="2236576" y="145"/>
+                  <a:pt x="2145330" y="5482"/>
+                  <a:pt x="2387864" y="0"/>
+                </a:cubicBezTo>
+                <a:cubicBezTo>
+                  <a:pt x="2630398" y="-5482"/>
+                  <a:pt x="2793207" y="18487"/>
+                  <a:pt x="2957695" y="0"/>
+                </a:cubicBezTo>
+                <a:cubicBezTo>
+                  <a:pt x="3122183" y="-18487"/>
+                  <a:pt x="3579141" y="19003"/>
+                  <a:pt x="3853144" y="0"/>
+                </a:cubicBezTo>
+                <a:cubicBezTo>
+                  <a:pt x="4127147" y="-19003"/>
+                  <a:pt x="4209857" y="12211"/>
+                  <a:pt x="4314436" y="0"/>
+                </a:cubicBezTo>
+                <a:cubicBezTo>
+                  <a:pt x="4419015" y="-12211"/>
+                  <a:pt x="4762459" y="-17220"/>
+                  <a:pt x="5209885" y="0"/>
+                </a:cubicBezTo>
+                <a:cubicBezTo>
+                  <a:pt x="5657311" y="17220"/>
+                  <a:pt x="5692663" y="-3290"/>
+                  <a:pt x="6105335" y="0"/>
+                </a:cubicBezTo>
+                <a:cubicBezTo>
+                  <a:pt x="6518007" y="3290"/>
+                  <a:pt x="6455516" y="-5124"/>
+                  <a:pt x="6783705" y="0"/>
+                </a:cubicBezTo>
+                <a:cubicBezTo>
+                  <a:pt x="7111894" y="5124"/>
+                  <a:pt x="7441941" y="-17829"/>
+                  <a:pt x="7679154" y="0"/>
+                </a:cubicBezTo>
+                <a:cubicBezTo>
+                  <a:pt x="7916367" y="17829"/>
+                  <a:pt x="8102967" y="-24363"/>
+                  <a:pt x="8248985" y="0"/>
+                </a:cubicBezTo>
+                <a:cubicBezTo>
+                  <a:pt x="8395003" y="24363"/>
+                  <a:pt x="8552393" y="25505"/>
+                  <a:pt x="8818817" y="0"/>
+                </a:cubicBezTo>
+                <a:cubicBezTo>
+                  <a:pt x="9085241" y="-25505"/>
+                  <a:pt x="9411308" y="38000"/>
+                  <a:pt x="9605726" y="0"/>
+                </a:cubicBezTo>
+                <a:cubicBezTo>
+                  <a:pt x="9800144" y="-38000"/>
+                  <a:pt x="10006468" y="-25741"/>
+                  <a:pt x="10175558" y="0"/>
+                </a:cubicBezTo>
+                <a:cubicBezTo>
+                  <a:pt x="10344648" y="25741"/>
+                  <a:pt x="10696282" y="695"/>
+                  <a:pt x="10853928" y="0"/>
+                </a:cubicBezTo>
+                <a:cubicBezTo>
+                  <a:pt x="10853521" y="8690"/>
+                  <a:pt x="10853774" y="14141"/>
+                  <a:pt x="10853928" y="18288"/>
+                </a:cubicBezTo>
+                <a:cubicBezTo>
+                  <a:pt x="10608124" y="24255"/>
+                  <a:pt x="10343415" y="22307"/>
+                  <a:pt x="10067018" y="18288"/>
+                </a:cubicBezTo>
+                <a:cubicBezTo>
+                  <a:pt x="9790621" y="14270"/>
+                  <a:pt x="9843266" y="3564"/>
+                  <a:pt x="9714266" y="18288"/>
+                </a:cubicBezTo>
+                <a:cubicBezTo>
+                  <a:pt x="9585266" y="33012"/>
+                  <a:pt x="9379484" y="1875"/>
+                  <a:pt x="9252974" y="18288"/>
+                </a:cubicBezTo>
+                <a:cubicBezTo>
+                  <a:pt x="9126464" y="34701"/>
+                  <a:pt x="8580678" y="-4904"/>
+                  <a:pt x="8357525" y="18288"/>
+                </a:cubicBezTo>
+                <a:cubicBezTo>
+                  <a:pt x="8134372" y="41480"/>
+                  <a:pt x="7903199" y="26458"/>
+                  <a:pt x="7679154" y="18288"/>
+                </a:cubicBezTo>
+                <a:cubicBezTo>
+                  <a:pt x="7455109" y="10118"/>
+                  <a:pt x="7435944" y="27109"/>
+                  <a:pt x="7217862" y="18288"/>
+                </a:cubicBezTo>
+                <a:cubicBezTo>
+                  <a:pt x="6999780" y="9467"/>
+                  <a:pt x="6680409" y="18985"/>
+                  <a:pt x="6539492" y="18288"/>
+                </a:cubicBezTo>
+                <a:cubicBezTo>
+                  <a:pt x="6398575" y="17592"/>
+                  <a:pt x="6312077" y="33018"/>
+                  <a:pt x="6186739" y="18288"/>
+                </a:cubicBezTo>
+                <a:cubicBezTo>
+                  <a:pt x="6061401" y="3558"/>
+                  <a:pt x="5947033" y="12075"/>
+                  <a:pt x="5833986" y="18288"/>
+                </a:cubicBezTo>
+                <a:cubicBezTo>
+                  <a:pt x="5720939" y="24501"/>
+                  <a:pt x="5482226" y="8586"/>
+                  <a:pt x="5155616" y="18288"/>
+                </a:cubicBezTo>
+                <a:cubicBezTo>
+                  <a:pt x="4829006" y="27991"/>
+                  <a:pt x="4841274" y="29316"/>
+                  <a:pt x="4694324" y="18288"/>
+                </a:cubicBezTo>
+                <a:cubicBezTo>
+                  <a:pt x="4547374" y="7260"/>
+                  <a:pt x="4077675" y="7013"/>
+                  <a:pt x="3907414" y="18288"/>
+                </a:cubicBezTo>
+                <a:cubicBezTo>
+                  <a:pt x="3737153" y="29564"/>
+                  <a:pt x="3538393" y="21630"/>
+                  <a:pt x="3446122" y="18288"/>
+                </a:cubicBezTo>
+                <a:cubicBezTo>
+                  <a:pt x="3353851" y="14946"/>
+                  <a:pt x="2990320" y="-8091"/>
+                  <a:pt x="2659212" y="18288"/>
+                </a:cubicBezTo>
+                <a:cubicBezTo>
+                  <a:pt x="2328104" y="44667"/>
+                  <a:pt x="2427653" y="9607"/>
+                  <a:pt x="2306460" y="18288"/>
+                </a:cubicBezTo>
+                <a:cubicBezTo>
+                  <a:pt x="2185267" y="26969"/>
+                  <a:pt x="1719763" y="3717"/>
+                  <a:pt x="1519550" y="18288"/>
+                </a:cubicBezTo>
+                <a:cubicBezTo>
+                  <a:pt x="1319337" y="32860"/>
+                  <a:pt x="1167371" y="17040"/>
+                  <a:pt x="1058258" y="18288"/>
+                </a:cubicBezTo>
+                <a:cubicBezTo>
+                  <a:pt x="949145" y="19536"/>
+                  <a:pt x="780234" y="31447"/>
+                  <a:pt x="705505" y="18288"/>
+                </a:cubicBezTo>
+                <a:cubicBezTo>
+                  <a:pt x="630776" y="5129"/>
+                  <a:pt x="215796" y="30056"/>
+                  <a:pt x="0" y="18288"/>
+                </a:cubicBezTo>
+                <a:cubicBezTo>
+                  <a:pt x="-53" y="11301"/>
+                  <a:pt x="-649" y="7756"/>
+                  <a:pt x="0" y="0"/>
+                </a:cubicBezTo>
+                <a:close/>
+              </a:path>
+            </a:pathLst>
+          </a:custGeom>
+          <a:solidFill>
+            <a:schemeClr val="accent2"/>
+          </a:solidFill>
+          <a:ln w="41275" cap="rnd">
+            <a:solidFill>
+              <a:schemeClr val="accent2"/>
+            </a:solidFill>
+            <a:round/>
+            <a:extLst>
+              <a:ext uri="{C807C97D-BFC1-408E-A445-0C87EB9F89A2}">
+                <ask:lineSketchStyleProps xmlns:ask="http://schemas.microsoft.com/office/drawing/2018/sketchyshapes" sd="1219033472">
+                  <a:prstGeom prst="rect">
+                    <a:avLst/>
+                  </a:prstGeom>
+                  <ask:type>
+                    <ask:lineSketchFreehand/>
+                  </ask:type>
+                </ask:lineSketchStyleProps>
+              </a:ext>
+            </a:extLst>
+          </a:ln>
+        </p:spPr>
+        <p:style>
+          <a:lnRef idx="2">
+            <a:schemeClr val="accent1">
+              <a:shade val="50000"/>
+            </a:schemeClr>
+          </a:lnRef>
+          <a:fillRef idx="1">
+            <a:schemeClr val="accent1"/>
+          </a:fillRef>
+          <a:effectRef idx="0">
+            <a:schemeClr val="accent1"/>
+          </a:effectRef>
+          <a:fontRef idx="minor">
+            <a:schemeClr val="lt1"/>
+          </a:fontRef>
+        </p:style>
+        <p:txBody>
+          <a:bodyPr rtlCol="0" anchor="ctr"/>
+          <a:lstStyle/>
+          <a:p>
+            <a:pPr algn="ctr"/>
+            <a:endParaRPr lang="en-US"/>
           </a:p>
         </p:txBody>
       </p:sp>
@@ -5853,343 +6168,117 @@
             <p:ph idx="1"/>
           </p:nvPr>
         </p:nvSpPr>
-        <p:spPr/>
+        <p:spPr>
+          <a:xfrm>
+            <a:off x="629281" y="1929384"/>
+            <a:ext cx="10966372" cy="4251960"/>
+          </a:xfrm>
+        </p:spPr>
         <p:txBody>
           <a:bodyPr>
-            <a:normAutofit lnSpcReduction="10000"/>
+            <a:normAutofit/>
           </a:bodyPr>
           <a:lstStyle/>
           <a:p>
             <a:r>
-              <a:rPr dirty="0"/>
-              <a:t>Nowy </a:t>
-            </a:r>
-            <a:r>
-              <a:rPr dirty="0" err="1"/>
-              <a:t>wymiar</a:t>
-            </a:r>
-            <a:r>
-              <a:rPr dirty="0"/>
-              <a:t> </a:t>
-            </a:r>
-            <a:r>
-              <a:rPr dirty="0" err="1"/>
-              <a:t>doświadczenia</a:t>
-            </a:r>
-            <a:r>
-              <a:rPr dirty="0"/>
-              <a:t> (UX):</a:t>
+              <a:rPr lang="pl-PL" sz="2800" noProof="0" dirty="0"/>
+              <a:t>Nowy wymiar doświadczenia (UX):</a:t>
             </a:r>
           </a:p>
           <a:p>
             <a:pPr lvl="1"/>
             <a:r>
-              <a:rPr dirty="0"/>
-              <a:t>KROK 1: Jan </a:t>
-            </a:r>
-            <a:r>
-              <a:rPr dirty="0" err="1"/>
-              <a:t>wybiera</a:t>
-            </a:r>
-            <a:r>
-              <a:rPr dirty="0"/>
-              <a:t> z </a:t>
-            </a:r>
-            <a:r>
-              <a:rPr dirty="0" err="1"/>
-              <a:t>telefonu</a:t>
-            </a:r>
-            <a:r>
-              <a:rPr dirty="0"/>
-              <a:t> </a:t>
-            </a:r>
-            <a:r>
-              <a:rPr dirty="0" err="1"/>
-              <a:t>wymarzony</a:t>
-            </a:r>
-            <a:r>
-              <a:rPr dirty="0"/>
-              <a:t> </a:t>
-            </a:r>
-            <a:r>
-              <a:rPr dirty="0" err="1"/>
-              <a:t>apartament</a:t>
-            </a:r>
-            <a:r>
-              <a:rPr dirty="0"/>
-              <a:t> </a:t>
-            </a:r>
-            <a:r>
-              <a:rPr dirty="0" err="1"/>
-              <a:t>na</a:t>
-            </a:r>
-            <a:r>
-              <a:rPr dirty="0"/>
-              <a:t> weekend w 2 </a:t>
-            </a:r>
-            <a:r>
-              <a:rPr dirty="0" err="1"/>
-              <a:t>minuty</a:t>
-            </a:r>
-            <a:r>
-              <a:rPr dirty="0"/>
-              <a:t>.</a:t>
+              <a:rPr lang="pl-PL" noProof="0" dirty="0"/>
+              <a:t>KROK 1: Jan wybiera z telefonu wymarzony apartament na weekend w 2 minuty.</a:t>
             </a:r>
           </a:p>
           <a:p>
             <a:pPr lvl="1"/>
             <a:r>
-              <a:rPr dirty="0"/>
-              <a:t>KROK 2: </a:t>
-            </a:r>
-            <a:r>
-              <a:rPr dirty="0" err="1"/>
-              <a:t>Bezpiecznie</a:t>
-            </a:r>
-            <a:r>
-              <a:rPr dirty="0"/>
-              <a:t> </a:t>
-            </a:r>
-            <a:r>
-              <a:rPr dirty="0" err="1"/>
-              <a:t>opłaca</a:t>
-            </a:r>
-            <a:r>
-              <a:rPr dirty="0"/>
-              <a:t> </a:t>
-            </a:r>
-            <a:r>
-              <a:rPr dirty="0" err="1"/>
-              <a:t>rezerwację</a:t>
-            </a:r>
-            <a:r>
-              <a:rPr lang="en-US" dirty="0"/>
-              <a:t> </a:t>
-            </a:r>
-            <a:r>
-              <a:rPr dirty="0"/>
-              <a:t>– </a:t>
-            </a:r>
-            <a:r>
-              <a:rPr dirty="0" err="1"/>
-              <a:t>rezerwacja</a:t>
-            </a:r>
-            <a:r>
-              <a:rPr dirty="0"/>
-              <a:t> jest </a:t>
-            </a:r>
-            <a:r>
-              <a:rPr dirty="0" err="1"/>
-              <a:t>natychmiast</a:t>
-            </a:r>
-            <a:r>
-              <a:rPr dirty="0"/>
-              <a:t> </a:t>
-            </a:r>
-            <a:r>
-              <a:rPr dirty="0" err="1"/>
-              <a:t>opłacona</a:t>
-            </a:r>
-            <a:r>
-              <a:rPr dirty="0"/>
-              <a:t> w </a:t>
-            </a:r>
-            <a:r>
-              <a:rPr dirty="0" err="1"/>
-              <a:t>systemie</a:t>
-            </a:r>
-            <a:r>
-              <a:rPr dirty="0"/>
-              <a:t>.</a:t>
+              <a:rPr lang="pl-PL" noProof="0" dirty="0"/>
+              <a:t>KROK 2: Bezpiecznie opłaca rezerwację – rezerwacja jest natychmiast opłacona w systemie.</a:t>
             </a:r>
           </a:p>
           <a:p>
             <a:pPr lvl="1"/>
             <a:r>
-              <a:rPr dirty="0"/>
-              <a:t>KROK 3: Po </a:t>
-            </a:r>
-            <a:r>
-              <a:rPr dirty="0" err="1"/>
-              <a:t>przyjeździe</a:t>
-            </a:r>
-            <a:r>
-              <a:rPr dirty="0"/>
-              <a:t> do </a:t>
-            </a:r>
-            <a:r>
-              <a:rPr dirty="0" err="1"/>
-              <a:t>hotelu</a:t>
-            </a:r>
-            <a:r>
-              <a:rPr dirty="0"/>
-              <a:t> </a:t>
-            </a:r>
-            <a:r>
-              <a:rPr dirty="0" err="1"/>
-              <a:t>podaje</a:t>
-            </a:r>
-            <a:r>
-              <a:rPr dirty="0"/>
-              <a:t> </a:t>
-            </a:r>
-            <a:r>
-              <a:rPr dirty="0" err="1"/>
-              <a:t>tylko</a:t>
-            </a:r>
-            <a:r>
-              <a:rPr dirty="0"/>
-              <a:t> </a:t>
-            </a:r>
-            <a:r>
-              <a:rPr dirty="0" err="1"/>
-              <a:t>nazwisko</a:t>
-            </a:r>
-            <a:r>
-              <a:rPr dirty="0"/>
-              <a:t>. </a:t>
-            </a:r>
-            <a:r>
-              <a:rPr dirty="0" err="1"/>
-              <a:t>Recepcjonista</a:t>
-            </a:r>
-            <a:r>
-              <a:rPr dirty="0"/>
-              <a:t> </a:t>
-            </a:r>
-            <a:r>
-              <a:rPr dirty="0" err="1"/>
-              <a:t>widzi</a:t>
-            </a:r>
-            <a:r>
-              <a:rPr dirty="0"/>
-              <a:t> </a:t>
-            </a:r>
-            <a:r>
-              <a:rPr dirty="0" err="1"/>
-              <a:t>zielone</a:t>
-            </a:r>
-            <a:r>
-              <a:rPr dirty="0"/>
-              <a:t> </a:t>
-            </a:r>
-            <a:r>
-              <a:rPr dirty="0" err="1"/>
-              <a:t>światło</a:t>
-            </a:r>
-            <a:r>
-              <a:rPr dirty="0"/>
-              <a:t> </a:t>
-            </a:r>
-            <a:r>
-              <a:rPr dirty="0" err="1"/>
-              <a:t>i</a:t>
-            </a:r>
-            <a:r>
-              <a:rPr dirty="0"/>
-              <a:t> </a:t>
-            </a:r>
-            <a:r>
-              <a:rPr dirty="0" err="1"/>
-              <a:t>jednym</a:t>
-            </a:r>
-            <a:r>
-              <a:rPr dirty="0"/>
-              <a:t> </a:t>
-            </a:r>
-            <a:r>
-              <a:rPr dirty="0" err="1"/>
-              <a:t>kliknięciem</a:t>
-            </a:r>
-            <a:r>
-              <a:rPr dirty="0"/>
-              <a:t> </a:t>
-            </a:r>
-            <a:r>
-              <a:rPr dirty="0" err="1"/>
-              <a:t>koduje</a:t>
-            </a:r>
-            <a:r>
-              <a:rPr dirty="0"/>
-              <a:t> </a:t>
-            </a:r>
-            <a:r>
-              <a:rPr dirty="0" err="1"/>
-              <a:t>kartę</a:t>
-            </a:r>
-            <a:r>
-              <a:rPr dirty="0"/>
-              <a:t>.</a:t>
+              <a:rPr lang="pl-PL" noProof="0" dirty="0"/>
+              <a:t>KROK 3: Po przyjeździe do hotelu podaje tylko nazwisko. Recepcjonista widzi zielone światło i jednym kliknięciem koduje kartę.</a:t>
             </a:r>
           </a:p>
           <a:p>
             <a:pPr lvl="1"/>
             <a:r>
-              <a:rPr dirty="0"/>
-              <a:t>W 15 </a:t>
-            </a:r>
-            <a:r>
-              <a:rPr dirty="0" err="1"/>
-              <a:t>sekund</a:t>
-            </a:r>
-            <a:r>
-              <a:rPr dirty="0"/>
-              <a:t> Jan </a:t>
-            </a:r>
-            <a:r>
-              <a:rPr dirty="0" err="1"/>
-              <a:t>odbiera</a:t>
-            </a:r>
-            <a:r>
-              <a:rPr dirty="0"/>
-              <a:t> </a:t>
-            </a:r>
-            <a:r>
-              <a:rPr dirty="0" err="1"/>
-              <a:t>klucz</a:t>
-            </a:r>
-            <a:r>
-              <a:rPr dirty="0"/>
-              <a:t> </a:t>
-            </a:r>
-            <a:r>
-              <a:rPr dirty="0" err="1"/>
-              <a:t>i</a:t>
-            </a:r>
-            <a:r>
-              <a:rPr dirty="0"/>
-              <a:t> </a:t>
-            </a:r>
-            <a:r>
-              <a:rPr dirty="0" err="1"/>
-              <a:t>odpoczywa</a:t>
-            </a:r>
-            <a:r>
-              <a:rPr dirty="0"/>
-              <a:t> w </a:t>
-            </a:r>
-            <a:r>
-              <a:rPr dirty="0" err="1"/>
-              <a:t>pokoju</a:t>
-            </a:r>
-            <a:r>
-              <a:rPr dirty="0"/>
-              <a:t>.</a:t>
-            </a:r>
-          </a:p>
-        </p:txBody>
-      </p:sp>
+              <a:rPr lang="pl-PL" noProof="0" dirty="0"/>
+              <a:t>W 15 sekund Jan odbiera klucz i odpoczywa w pokoju.</a:t>
+            </a:r>
+          </a:p>
+        </p:txBody>
+      </p:sp>
+      <p:pic>
+        <p:nvPicPr>
+          <p:cNvPr id="4" name="Picture 4" descr="Kalkulator, pióro, kompas, pieniądze i papier z drukowanymi wykresami">
+            <a:extLst>
+              <a:ext uri="{FF2B5EF4-FFF2-40B4-BE49-F238E27FC236}">
+                <a16:creationId xmlns:a16="http://schemas.microsoft.com/office/drawing/2014/main" id="{A605FAEF-A1A1-6207-5609-E6FEB168AE60}"/>
+              </a:ext>
+            </a:extLst>
+          </p:cNvPr>
+          <p:cNvPicPr>
+            <a:picLocks noGrp="1" noRot="1" noChangeAspect="1" noMove="1" noResize="1" noEditPoints="1" noAdjustHandles="1" noChangeArrowheads="1" noChangeShapeType="1" noCrop="1"/>
+          </p:cNvPicPr>
+          <p:nvPr/>
+        </p:nvPicPr>
+        <p:blipFill>
+          <a:blip r:embed="rId3">
+            <a:alphaModFix amt="0"/>
+          </a:blip>
+          <a:srcRect l="25303" r="21080" b="-2"/>
+          <a:stretch>
+            <a:fillRect/>
+          </a:stretch>
+        </p:blipFill>
+        <p:spPr>
+          <a:xfrm>
+            <a:off x="6086127" y="6858000"/>
+            <a:ext cx="6102825" cy="6858000"/>
+          </a:xfrm>
+          <a:prstGeom prst="rect">
+            <a:avLst/>
+          </a:prstGeom>
+        </p:spPr>
+      </p:pic>
     </p:spTree>
   </p:cSld>
   <p:clrMapOvr>
     <a:masterClrMapping/>
   </p:clrMapOvr>
+  <mc:AlternateContent xmlns:mc="http://schemas.openxmlformats.org/markup-compatibility/2006">
+    <mc:Choice xmlns:p159="http://schemas.microsoft.com/office/powerpoint/2015/09/main" Requires="p159">
+      <p:transition spd="slow">
+        <p159:morph option="byObject"/>
+      </p:transition>
+    </mc:Choice>
+    <mc:Fallback>
+      <p:transition spd="slow">
+        <p:fade/>
+      </p:transition>
+    </mc:Fallback>
+  </mc:AlternateContent>
 </p:sld>
 </file>
 
 <file path=ppt/slides/slide6.xml><?xml version="1.0" encoding="utf-8"?>
 <p:sld xmlns:a="http://schemas.openxmlformats.org/drawingml/2006/main" xmlns:r="http://schemas.openxmlformats.org/officeDocument/2006/relationships" xmlns:p="http://schemas.openxmlformats.org/presentationml/2006/main">
   <p:cSld>
+    <p:bg>
+      <p:bgPr>
+        <a:solidFill>
+          <a:schemeClr val="bg1"/>
+        </a:solidFill>
+        <a:effectLst/>
+      </p:bgPr>
+    </p:bg>
     <p:spTree>
       <p:nvGrpSpPr>
         <p:cNvPr id="1" name=""/>
@@ -6214,19 +6303,78 @@
             <p:ph type="title"/>
           </p:nvPr>
         </p:nvSpPr>
-        <p:spPr/>
-        <p:txBody>
-          <a:bodyPr/>
-          <a:lstStyle/>
-          <a:p>
-            <a:r>
-              <a:rPr dirty="0" err="1"/>
+        <p:spPr>
+          <a:xfrm>
+            <a:off x="838200" y="669925"/>
+            <a:ext cx="4508946" cy="1325563"/>
+          </a:xfrm>
+        </p:spPr>
+        <p:txBody>
+          <a:bodyPr anchor="b">
+            <a:normAutofit/>
+          </a:bodyPr>
+          <a:lstStyle/>
+          <a:p>
+            <a:pPr algn="r"/>
+            <a:r>
+              <a:rPr lang="pl-PL" noProof="0" dirty="0"/>
               <a:t>Podsumowanie</a:t>
             </a:r>
-            <a:endParaRPr dirty="0"/>
-          </a:p>
-        </p:txBody>
-      </p:sp>
+          </a:p>
+        </p:txBody>
+      </p:sp>
+      <p:cxnSp>
+        <p:nvCxnSpPr>
+          <p:cNvPr id="10" name="Straight Connector 9">
+            <a:extLst>
+              <a:ext uri="{FF2B5EF4-FFF2-40B4-BE49-F238E27FC236}">
+                <a16:creationId xmlns:a16="http://schemas.microsoft.com/office/drawing/2014/main" id="{EE504C98-6397-41C1-A8D8-2D9C4ED307E0}"/>
+              </a:ext>
+              <a:ext uri="{C183D7F6-B498-43B3-948B-1728B52AA6E4}">
+                <adec:decorative xmlns:adec="http://schemas.microsoft.com/office/drawing/2017/decorative" val="1"/>
+              </a:ext>
+            </a:extLst>
+          </p:cNvPr>
+          <p:cNvCxnSpPr>
+            <a:cxnSpLocks noGrp="1" noRot="1" noChangeAspect="1" noMove="1" noResize="1" noEditPoints="1" noAdjustHandles="1" noChangeArrowheads="1" noChangeShapeType="1"/>
+          </p:cNvCxnSpPr>
+          <p:nvPr>
+            <p:extLst>
+              <p:ext uri="{386F3935-93C4-4BCD-93E2-E3B085C9AB24}">
+                <p16:designElem xmlns:p16="http://schemas.microsoft.com/office/powerpoint/2015/main" val="1"/>
+              </p:ext>
+            </p:extLst>
+          </p:nvPr>
+        </p:nvCxnSpPr>
+        <p:spPr>
+          <a:xfrm flipH="1">
+            <a:off x="126210" y="2026340"/>
+            <a:ext cx="5220936" cy="0"/>
+          </a:xfrm>
+          <a:prstGeom prst="line">
+            <a:avLst/>
+          </a:prstGeom>
+          <a:ln w="12700">
+            <a:solidFill>
+              <a:schemeClr val="accent2"/>
+            </a:solidFill>
+          </a:ln>
+        </p:spPr>
+        <p:style>
+          <a:lnRef idx="1">
+            <a:schemeClr val="accent1"/>
+          </a:lnRef>
+          <a:fillRef idx="0">
+            <a:schemeClr val="accent1"/>
+          </a:fillRef>
+          <a:effectRef idx="0">
+            <a:schemeClr val="accent1"/>
+          </a:effectRef>
+          <a:fontRef idx="minor">
+            <a:schemeClr val="tx1"/>
+          </a:fontRef>
+        </p:style>
+      </p:cxnSp>
       <p:sp>
         <p:nvSpPr>
           <p:cNvPr id="3" name="Content Placeholder 2"/>
@@ -6237,231 +6385,185 @@
             <p:ph idx="1"/>
           </p:nvPr>
         </p:nvSpPr>
-        <p:spPr/>
-        <p:txBody>
-          <a:bodyPr/>
-          <a:lstStyle/>
-          <a:p>
-            <a:r>
-              <a:rPr dirty="0" err="1"/>
-              <a:t>Dlaczego</a:t>
-            </a:r>
-            <a:r>
-              <a:rPr dirty="0"/>
-              <a:t> ten </a:t>
-            </a:r>
-            <a:r>
-              <a:rPr dirty="0" err="1"/>
-              <a:t>projekt</a:t>
-            </a:r>
-            <a:r>
-              <a:rPr dirty="0"/>
-              <a:t> jest </a:t>
-            </a:r>
-            <a:r>
-              <a:rPr dirty="0" err="1"/>
-              <a:t>gotowy</a:t>
-            </a:r>
-            <a:r>
-              <a:rPr dirty="0"/>
-              <a:t> </a:t>
-            </a:r>
-            <a:r>
-              <a:rPr dirty="0" err="1"/>
-              <a:t>na</a:t>
-            </a:r>
-            <a:r>
-              <a:rPr dirty="0"/>
-              <a:t> </a:t>
-            </a:r>
-            <a:r>
-              <a:rPr dirty="0" err="1"/>
-              <a:t>sukces</a:t>
-            </a:r>
-            <a:r>
-              <a:rPr dirty="0"/>
-              <a:t>?</a:t>
+        <p:spPr>
+          <a:xfrm>
+            <a:off x="1129553" y="2398957"/>
+            <a:ext cx="10058400" cy="3526144"/>
+          </a:xfrm>
+        </p:spPr>
+        <p:txBody>
+          <a:bodyPr>
+            <a:normAutofit/>
+          </a:bodyPr>
+          <a:lstStyle/>
+          <a:p>
+            <a:r>
+              <a:rPr lang="pl-PL" sz="2800" noProof="0" dirty="0"/>
+              <a:t>Dlaczego ten projekt jest gotowy na sukces?</a:t>
             </a:r>
           </a:p>
           <a:p>
             <a:pPr lvl="1"/>
             <a:r>
-              <a:rPr dirty="0" err="1"/>
-              <a:t>Kompletna</a:t>
-            </a:r>
-            <a:r>
-              <a:rPr dirty="0"/>
-              <a:t> </a:t>
-            </a:r>
-            <a:r>
-              <a:rPr dirty="0" err="1"/>
-              <a:t>dokumentacja</a:t>
-            </a:r>
-            <a:r>
-              <a:rPr dirty="0"/>
-              <a:t> UML.</a:t>
+              <a:rPr lang="pl-PL" noProof="0" dirty="0"/>
+              <a:t>Kompletna dokumentacja UML.</a:t>
             </a:r>
           </a:p>
           <a:p>
             <a:pPr lvl="1"/>
             <a:r>
-              <a:rPr dirty="0" err="1"/>
-              <a:t>Przemyślany</a:t>
-            </a:r>
-            <a:r>
-              <a:rPr dirty="0"/>
-              <a:t> </a:t>
-            </a:r>
-            <a:r>
-              <a:rPr dirty="0" err="1"/>
-              <a:t>projekt</a:t>
-            </a:r>
-            <a:r>
-              <a:rPr dirty="0"/>
-              <a:t> </a:t>
-            </a:r>
-            <a:r>
-              <a:rPr dirty="0" err="1"/>
-              <a:t>bazy</a:t>
-            </a:r>
-            <a:r>
-              <a:rPr dirty="0"/>
-              <a:t> </a:t>
-            </a:r>
-            <a:r>
-              <a:rPr dirty="0" err="1"/>
-              <a:t>danych</a:t>
-            </a:r>
-            <a:r>
-              <a:rPr dirty="0"/>
-              <a:t> </a:t>
-            </a:r>
-            <a:r>
-              <a:rPr dirty="0" err="1"/>
-              <a:t>i</a:t>
-            </a:r>
-            <a:r>
-              <a:rPr dirty="0"/>
-              <a:t> </a:t>
-            </a:r>
-            <a:r>
-              <a:rPr lang="en-US" dirty="0" err="1"/>
-              <a:t>prototypy</a:t>
-            </a:r>
-            <a:r>
-              <a:rPr lang="en-US" dirty="0"/>
-              <a:t> menu</a:t>
-            </a:r>
-            <a:r>
-              <a:rPr dirty="0"/>
-              <a:t>.</a:t>
+              <a:rPr lang="pl-PL" noProof="0" dirty="0"/>
+              <a:t>Przemyślany projekt bazy danych i prototypy menu.</a:t>
             </a:r>
           </a:p>
           <a:p>
             <a:pPr lvl="1"/>
             <a:r>
-              <a:rPr dirty="0"/>
-              <a:t>System </a:t>
-            </a:r>
-            <a:r>
-              <a:rPr dirty="0" err="1"/>
-              <a:t>zaprojektowany</a:t>
-            </a:r>
-            <a:r>
-              <a:rPr dirty="0"/>
-              <a:t> </a:t>
-            </a:r>
-            <a:r>
-              <a:rPr dirty="0" err="1"/>
-              <a:t>tak</a:t>
-            </a:r>
-            <a:r>
-              <a:rPr dirty="0"/>
-              <a:t>, by </a:t>
-            </a:r>
-            <a:r>
-              <a:rPr dirty="0" err="1"/>
-              <a:t>skalował</a:t>
-            </a:r>
-            <a:r>
-              <a:rPr dirty="0"/>
-              <a:t> </a:t>
-            </a:r>
-            <a:r>
-              <a:rPr dirty="0" err="1"/>
-              <a:t>się</a:t>
-            </a:r>
-            <a:r>
-              <a:rPr dirty="0"/>
-              <a:t> </a:t>
-            </a:r>
-            <a:r>
-              <a:rPr dirty="0" err="1"/>
-              <a:t>razem</a:t>
-            </a:r>
-            <a:r>
-              <a:rPr dirty="0"/>
-              <a:t> z </a:t>
-            </a:r>
-            <a:r>
-              <a:rPr dirty="0" err="1"/>
-              <a:t>biznesem</a:t>
-            </a:r>
-            <a:r>
-              <a:rPr dirty="0"/>
-              <a:t>.</a:t>
+              <a:rPr lang="pl-PL" noProof="0" dirty="0"/>
+              <a:t>System zaprojektowany tak, by skalował się razem z biznesem.</a:t>
             </a:r>
           </a:p>
           <a:p>
             <a:pPr lvl="1"/>
             <a:r>
-              <a:rPr dirty="0" err="1"/>
-              <a:t>Zapraszamy</a:t>
-            </a:r>
-            <a:r>
-              <a:rPr dirty="0"/>
-              <a:t> do </a:t>
-            </a:r>
-            <a:r>
-              <a:rPr dirty="0" err="1"/>
-              <a:t>zapoznania</a:t>
-            </a:r>
-            <a:r>
-              <a:rPr dirty="0"/>
-              <a:t> </a:t>
-            </a:r>
-            <a:r>
-              <a:rPr dirty="0" err="1"/>
-              <a:t>się</a:t>
-            </a:r>
-            <a:r>
-              <a:rPr dirty="0"/>
-              <a:t> ze </a:t>
-            </a:r>
-            <a:r>
-              <a:rPr dirty="0" err="1"/>
-              <a:t>szczegółami</a:t>
-            </a:r>
-            <a:r>
-              <a:rPr dirty="0"/>
-              <a:t> </a:t>
-            </a:r>
-            <a:r>
-              <a:rPr dirty="0" err="1"/>
-              <a:t>dokumentacji</a:t>
-            </a:r>
-            <a:r>
-              <a:rPr dirty="0"/>
-              <a:t> </a:t>
-            </a:r>
-            <a:r>
-              <a:rPr dirty="0" err="1"/>
-              <a:t>analitycznej</a:t>
-            </a:r>
-            <a:r>
-              <a:rPr dirty="0"/>
-              <a:t>!</a:t>
-            </a:r>
+              <a:rPr lang="pl-PL" noProof="0" dirty="0"/>
+              <a:t>Zapraszamy do zapoznania się ze szczegółami dokumentacji analitycznej!</a:t>
+            </a:r>
+          </a:p>
+        </p:txBody>
+      </p:sp>
+      <p:sp>
+        <p:nvSpPr>
+          <p:cNvPr id="12" name="Rectangle 11">
+            <a:extLst>
+              <a:ext uri="{FF2B5EF4-FFF2-40B4-BE49-F238E27FC236}">
+                <a16:creationId xmlns:a16="http://schemas.microsoft.com/office/drawing/2014/main" id="{9DD005C1-8C51-42D6-9BEE-B9B83849743D}"/>
+              </a:ext>
+              <a:ext uri="{C183D7F6-B498-43B3-948B-1728B52AA6E4}">
+                <adec:decorative xmlns:adec="http://schemas.microsoft.com/office/drawing/2017/decorative" val="1"/>
+              </a:ext>
+            </a:extLst>
+          </p:cNvPr>
+          <p:cNvSpPr>
+            <a:spLocks noGrp="1" noRot="1" noChangeAspect="1" noMove="1" noResize="1" noEditPoints="1" noAdjustHandles="1" noChangeArrowheads="1" noChangeShapeType="1" noTextEdit="1"/>
+          </p:cNvSpPr>
+          <p:nvPr>
+            <p:extLst>
+              <p:ext uri="{386F3935-93C4-4BCD-93E2-E3B085C9AB24}">
+                <p16:designElem xmlns:p16="http://schemas.microsoft.com/office/powerpoint/2015/main" val="1"/>
+              </p:ext>
+            </p:extLst>
+          </p:nvPr>
+        </p:nvSpPr>
+        <p:spPr>
+          <a:xfrm>
+            <a:off x="126206" y="115193"/>
+            <a:ext cx="11939588" cy="6627614"/>
+          </a:xfrm>
+          <a:prstGeom prst="rect">
+            <a:avLst/>
+          </a:prstGeom>
+          <a:noFill/>
+          <a:ln w="12700">
+            <a:solidFill>
+              <a:schemeClr val="accent2"/>
+            </a:solidFill>
+          </a:ln>
+        </p:spPr>
+        <p:style>
+          <a:lnRef idx="2">
+            <a:schemeClr val="accent1">
+              <a:shade val="50000"/>
+            </a:schemeClr>
+          </a:lnRef>
+          <a:fillRef idx="1">
+            <a:schemeClr val="accent1"/>
+          </a:fillRef>
+          <a:effectRef idx="0">
+            <a:schemeClr val="accent1"/>
+          </a:effectRef>
+          <a:fontRef idx="minor">
+            <a:schemeClr val="lt1"/>
+          </a:fontRef>
+        </p:style>
+        <p:txBody>
+          <a:bodyPr rtlCol="0" anchor="ctr"/>
+          <a:lstStyle/>
+          <a:p>
+            <a:pPr algn="ctr"/>
+            <a:endParaRPr lang="en-US"/>
+          </a:p>
+        </p:txBody>
+      </p:sp>
+      <p:sp>
+        <p:nvSpPr>
+          <p:cNvPr id="5" name="Prostokąt 4">
+            <a:extLst>
+              <a:ext uri="{FF2B5EF4-FFF2-40B4-BE49-F238E27FC236}">
+                <a16:creationId xmlns:a16="http://schemas.microsoft.com/office/drawing/2014/main" id="{69CE4F86-B276-ACF6-DB35-92857DC51629}"/>
+              </a:ext>
+            </a:extLst>
+          </p:cNvPr>
+          <p:cNvSpPr>
+            <a:spLocks noGrp="1" noRot="1" noMove="1" noResize="1" noEditPoints="1" noAdjustHandles="1" noChangeArrowheads="1" noChangeShapeType="1"/>
+          </p:cNvSpPr>
+          <p:nvPr/>
+        </p:nvSpPr>
+        <p:spPr>
+          <a:xfrm rot="10800000">
+            <a:off x="0" y="-1640481"/>
+            <a:ext cx="12192000" cy="1600201"/>
+          </a:xfrm>
+          <a:prstGeom prst="rect">
+            <a:avLst/>
+          </a:prstGeom>
+          <a:gradFill flip="none" rotWithShape="1">
+            <a:gsLst>
+              <a:gs pos="0">
+                <a:schemeClr val="dk1">
+                  <a:lumMod val="67000"/>
+                </a:schemeClr>
+              </a:gs>
+              <a:gs pos="48000">
+                <a:schemeClr val="dk1">
+                  <a:lumMod val="97000"/>
+                  <a:lumOff val="3000"/>
+                </a:schemeClr>
+              </a:gs>
+              <a:gs pos="100000">
+                <a:schemeClr val="dk1">
+                  <a:lumMod val="60000"/>
+                  <a:lumOff val="40000"/>
+                </a:schemeClr>
+              </a:gs>
+            </a:gsLst>
+            <a:lin ang="16200000" scaled="1"/>
+            <a:tileRect/>
+          </a:gradFill>
+          <a:ln>
+            <a:noFill/>
+          </a:ln>
+        </p:spPr>
+        <p:style>
+          <a:lnRef idx="0">
+            <a:scrgbClr r="0" g="0" b="0"/>
+          </a:lnRef>
+          <a:fillRef idx="0">
+            <a:scrgbClr r="0" g="0" b="0"/>
+          </a:fillRef>
+          <a:effectRef idx="0">
+            <a:scrgbClr r="0" g="0" b="0"/>
+          </a:effectRef>
+          <a:fontRef idx="minor">
+            <a:schemeClr val="lt1"/>
+          </a:fontRef>
+        </p:style>
+        <p:txBody>
+          <a:bodyPr rtlCol="0" anchor="ctr"/>
+          <a:lstStyle/>
+          <a:p>
+            <a:pPr algn="ctr"/>
+            <a:endParaRPr lang="pl-PL"/>
           </a:p>
         </p:txBody>
       </p:sp>
@@ -6470,6 +6572,18 @@
   <p:clrMapOvr>
     <a:masterClrMapping/>
   </p:clrMapOvr>
+  <mc:AlternateContent xmlns:mc="http://schemas.openxmlformats.org/markup-compatibility/2006">
+    <mc:Choice xmlns:p159="http://schemas.microsoft.com/office/powerpoint/2015/09/main" Requires="p159">
+      <p:transition spd="slow">
+        <p159:morph option="byObject"/>
+      </p:transition>
+    </mc:Choice>
+    <mc:Fallback>
+      <p:transition spd="slow">
+        <p:fade/>
+      </p:transition>
+    </mc:Fallback>
+  </mc:AlternateContent>
 </p:sld>
 </file>
 
@@ -6492,6 +6606,76 @@
       </p:grpSpPr>
       <p:sp>
         <p:nvSpPr>
+          <p:cNvPr id="6" name="Prostokąt 5">
+            <a:extLst>
+              <a:ext uri="{FF2B5EF4-FFF2-40B4-BE49-F238E27FC236}">
+                <a16:creationId xmlns:a16="http://schemas.microsoft.com/office/drawing/2014/main" id="{3B4C6F34-14C0-B3C5-F540-9800045DFB36}"/>
+              </a:ext>
+            </a:extLst>
+          </p:cNvPr>
+          <p:cNvSpPr/>
+          <p:nvPr/>
+        </p:nvSpPr>
+        <p:spPr>
+          <a:xfrm rot="10800000">
+            <a:off x="0" y="0"/>
+            <a:ext cx="12192000" cy="1600201"/>
+          </a:xfrm>
+          <a:prstGeom prst="rect">
+            <a:avLst/>
+          </a:prstGeom>
+          <a:gradFill flip="none" rotWithShape="1">
+            <a:gsLst>
+              <a:gs pos="0">
+                <a:schemeClr val="dk1">
+                  <a:lumMod val="67000"/>
+                </a:schemeClr>
+              </a:gs>
+              <a:gs pos="48000">
+                <a:schemeClr val="dk1">
+                  <a:lumMod val="97000"/>
+                  <a:lumOff val="3000"/>
+                </a:schemeClr>
+              </a:gs>
+              <a:gs pos="100000">
+                <a:schemeClr val="dk1">
+                  <a:lumMod val="60000"/>
+                  <a:lumOff val="40000"/>
+                </a:schemeClr>
+              </a:gs>
+            </a:gsLst>
+            <a:lin ang="16200000" scaled="1"/>
+            <a:tileRect/>
+          </a:gradFill>
+          <a:ln>
+            <a:noFill/>
+          </a:ln>
+        </p:spPr>
+        <p:style>
+          <a:lnRef idx="0">
+            <a:scrgbClr r="0" g="0" b="0"/>
+          </a:lnRef>
+          <a:fillRef idx="0">
+            <a:scrgbClr r="0" g="0" b="0"/>
+          </a:fillRef>
+          <a:effectRef idx="0">
+            <a:scrgbClr r="0" g="0" b="0"/>
+          </a:effectRef>
+          <a:fontRef idx="minor">
+            <a:schemeClr val="lt1"/>
+          </a:fontRef>
+        </p:style>
+        <p:txBody>
+          <a:bodyPr rtlCol="0" anchor="ctr"/>
+          <a:lstStyle/>
+          <a:p>
+            <a:pPr algn="ctr"/>
+            <a:endParaRPr lang="pl-PL"/>
+          </a:p>
+        </p:txBody>
+      </p:sp>
+      <p:sp>
+        <p:nvSpPr>
           <p:cNvPr id="2" name="Tytuł 1">
             <a:extLst>
               <a:ext uri="{FF2B5EF4-FFF2-40B4-BE49-F238E27FC236}">
@@ -6512,42 +6696,13 @@
           <a:lstStyle/>
           <a:p>
             <a:r>
-              <a:rPr lang="en-US" dirty="0" err="1"/>
-              <a:t>Dziekujemy</a:t>
-            </a:r>
-            <a:r>
-              <a:rPr lang="en-US" dirty="0"/>
-              <a:t>!</a:t>
-            </a:r>
-            <a:endParaRPr lang="pl-PL" dirty="0"/>
-          </a:p>
-        </p:txBody>
-      </p:sp>
-      <p:sp>
-        <p:nvSpPr>
-          <p:cNvPr id="3" name="Symbol zastępczy zawartości 2">
-            <a:extLst>
-              <a:ext uri="{FF2B5EF4-FFF2-40B4-BE49-F238E27FC236}">
-                <a16:creationId xmlns:a16="http://schemas.microsoft.com/office/drawing/2014/main" id="{958E60ED-4732-CE75-FF86-0150358D0D7E}"/>
-              </a:ext>
-            </a:extLst>
-          </p:cNvPr>
-          <p:cNvSpPr>
-            <a:spLocks noGrp="1"/>
-          </p:cNvSpPr>
-          <p:nvPr>
-            <p:ph idx="1"/>
-          </p:nvPr>
-        </p:nvSpPr>
-        <p:spPr/>
-        <p:txBody>
-          <a:bodyPr/>
-          <a:lstStyle/>
-          <a:p>
-            <a:pPr marL="0" indent="0">
-              <a:buNone/>
-            </a:pPr>
-            <a:endParaRPr lang="pl-PL" dirty="0"/>
+              <a:rPr lang="pl-PL" noProof="0" dirty="0">
+                <a:solidFill>
+                  <a:schemeClr val="bg1"/>
+                </a:solidFill>
+              </a:rPr>
+              <a:t>Dziękujemy!</a:t>
+            </a:r>
           </a:p>
         </p:txBody>
       </p:sp>
@@ -6561,6 +6716,18 @@
   <p:clrMapOvr>
     <a:masterClrMapping/>
   </p:clrMapOvr>
+  <mc:AlternateContent xmlns:mc="http://schemas.openxmlformats.org/markup-compatibility/2006">
+    <mc:Choice xmlns:p159="http://schemas.microsoft.com/office/powerpoint/2015/09/main" Requires="p159">
+      <p:transition spd="slow">
+        <p159:morph option="byObject"/>
+      </p:transition>
+    </mc:Choice>
+    <mc:Fallback>
+      <p:transition spd="slow">
+        <p:fade/>
+      </p:transition>
+    </mc:Fallback>
+  </mc:AlternateContent>
 </p:sld>
 </file>
 
